--- a/freelance/samples/pptx/Pitch_Deck_Campus_Marketplace_App.pptx
+++ b/freelance/samples/pptx/Pitch_Deck_Campus_Marketplace_App.pptx
@@ -512,7 +512,7 @@
           <a:lstStyle/>
           <a:p>
             <a:r>
-              <a:t>Good afternoon investors and academic mentors. We are proud to pitch UniTrade—a secure peer-to-peer campus commerce network built specifically for college students.</a:t>
+              <a:t>Good morning investors. Today we introduce Campus Marketplace — the dedicated, verified mobile commerce hub designed specifically for university students across the Philippines.</a:t>
             </a:r>
           </a:p>
         </p:txBody>
@@ -582,7 +582,7 @@
           <a:lstStyle/>
           <a:p>
             <a:r>
-              <a:t>In conclusion, UniTrade combines high student retention, viral word-of-mouth adoption, and a scalable software architecture.</a:t>
+              <a:t>We are raising ₱2.5 million to scale engineering and campus marketing. We invite you to partner with us in modernizing collegiate commerce across the nation.</a:t>
             </a:r>
           </a:p>
         </p:txBody>
@@ -652,7 +652,7 @@
           <a:lstStyle/>
           <a:p>
             <a:r>
-              <a:t>Thank you for listening to our pitch. We are excited to answer questions from the investment panel.</a:t>
+              <a:t>Thank you. Let's empower students to trade safely and build a vibrant circular campus economy. We welcome your partnership and questions.</a:t>
             </a:r>
           </a:p>
         </p:txBody>
@@ -722,7 +722,7 @@
           <a:lstStyle/>
           <a:p>
             <a:r>
-              <a:t>Here is our four-point pitch deck structure: problem, solution, market validation, and business monetization model.</a:t>
+              <a:t>Over 3.5 million tertiary students in the Philippines buy and sell secondhand textbooks, lab coats, and electronics every semester. Yet, they are forced to use chaotic Facebook groups where scamming and ghosting are rampant.</a:t>
             </a:r>
           </a:p>
         </p:txBody>
@@ -792,7 +792,7 @@
           <a:lstStyle/>
           <a:p>
             <a:r>
-              <a:t>Students buy textbooks, uniforms, and calculators every semester. They deserve a verified, safe platform built exclusively for their campus.</a:t>
+              <a:t>Our solution: a closed-loop platform accessible exclusively to verified college students, featuring designated campus safe pickup zones and built-in escrow.</a:t>
             </a:r>
           </a:p>
         </p:txBody>
@@ -862,7 +862,7 @@
           <a:lstStyle/>
           <a:p>
             <a:r>
-              <a:t>Let us examine why generic marketplaces like Facebook Groups create severe safety and fraud risks for college students.</a:t>
+              <a:t>As visualized on the market breakdown, our serviceable obtainable market represents ₱120 million across the extensive STI network alone, providing an immense captive user base for rapid unit-economic scaling.</a:t>
             </a:r>
           </a:p>
         </p:txBody>
@@ -932,7 +932,7 @@
           <a:lstStyle/>
           <a:p>
             <a:r>
-              <a:t>Data demonstrates that nearly four in five students trade second-hand gear, yet 42% experience cancellations, scams, or unsafe meetup situations.</a:t>
+              <a:t>These three core pillars solve trust. By binding accounts to verified student IDs and protecting funds through escrow, fraudulent listings drop to absolute zero.</a:t>
             </a:r>
           </a:p>
         </p:txBody>
@@ -1002,7 +1002,7 @@
           <a:lstStyle/>
           <a:p>
             <a:r>
-              <a:t>UniTrade solves safety with institutional email verification, monitored campus trade zones, and digital escrow protection.</a:t>
+              <a:t>Our revenue model is diversified. A modest 3.5% transaction commission generates strong margins, while campus merchant partnerships and micro-promotions provide recurring monthly cash flow.</a:t>
             </a:r>
           </a:p>
         </p:txBody>
@@ -1072,7 +1072,7 @@
           <a:lstStyle/>
           <a:p>
             <a:r>
-              <a:t>Here is our competitive advantage: complete safety and peer accountability vs unregulated, anonymous social groups.</a:t>
+              <a:t>During our 60-day pilot at STI WNU, over 1,200 students onboarded, generating ₱480,000 in gross merchandise volume with a 98.4% customer satisfaction score.</a:t>
             </a:r>
           </a:p>
         </p:txBody>
@@ -1142,7 +1142,7 @@
           <a:lstStyle/>
           <a:p>
             <a:r>
-              <a:t>Part Two presents our financial projections, business monetization model, and expansion trajectory across Western Visayas.</a:t>
+              <a:t>The user experience is frictionless. A student can photograph an unwanted textbook, tag their course subject, and publish the listing in under 45 seconds.</a:t>
             </a:r>
           </a:p>
         </p:txBody>
@@ -1212,7 +1212,7 @@
           <a:lstStyle/>
           <a:p>
             <a:r>
-              <a:t>The user flow is frictionless: list in 30 seconds, lock payment into escrow, complete safe exchange in the library, and release funds.</a:t>
+              <a:t>Our growth trajectory follows a disciplined hub-and-spoke expansion, scaling from Bacolod to Iloilo and ultimately activating the full nationwide STI campus network.</a:t>
             </a:r>
           </a:p>
         </p:txBody>
@@ -4209,7 +4209,7 @@
 </file>
 
 <file path=ppt/slides/slide1.xml><?xml version="1.0" encoding="utf-8"?>
-<p:sld xmlns:a="http://schemas.openxmlformats.org/drawingml/2006/main" xmlns:p="http://schemas.openxmlformats.org/presentationml/2006/main" xmlns:r="http://schemas.openxmlformats.org/officeDocument/2006/relationships">
+<p:sld xmlns:p14="http://schemas.microsoft.com/office/powerpoint/2010/main" xmlns:a="http://schemas.openxmlformats.org/drawingml/2006/main" xmlns:p="http://schemas.openxmlformats.org/presentationml/2006/main" xmlns:r="http://schemas.openxmlformats.org/officeDocument/2006/relationships">
   <p:cSld>
     <p:spTree>
       <p:nvGrpSpPr>
@@ -4233,7 +4233,7 @@
             <a:avLst/>
           </a:prstGeom>
           <a:solidFill>
-            <a:srgbClr val="0F172A"/>
+            <a:srgbClr val="062820"/>
           </a:solidFill>
           <a:ln>
             <a:noFill/>
@@ -4261,68 +4261,40 @@
           </a:p>
         </p:txBody>
       </p:sp>
-      <p:sp>
-        <p:nvSpPr>
-          <p:cNvPr id="3" name="Rounded Rectangle 2"/>
-          <p:cNvSpPr/>
+      <p:pic>
+        <p:nvPicPr>
+          <p:cNvPr id="3" name="!!Hero_Image" descr="market_hero.png"/>
+          <p:cNvPicPr>
+            <a:picLocks noChangeAspect="1"/>
+          </p:cNvPicPr>
           <p:nvPr/>
-        </p:nvSpPr>
-        <p:spPr>
-          <a:xfrm>
-            <a:off x="731520" y="1097280"/>
-            <a:ext cx="3474720" cy="411480"/>
-          </a:xfrm>
-          <a:prstGeom prst="roundRect">
+        </p:nvPicPr>
+        <p:blipFill>
+          <a:blip r:embed="rId2"/>
+          <a:stretch>
+            <a:fillRect/>
+          </a:stretch>
+        </p:blipFill>
+        <p:spPr>
+          <a:xfrm>
+            <a:off x="6217920" y="731520"/>
+            <a:ext cx="5303520" cy="5394960"/>
+          </a:xfrm>
+          <a:prstGeom prst="rect">
             <a:avLst/>
           </a:prstGeom>
-          <a:solidFill>
-            <a:srgbClr val="3B82F6"/>
-          </a:solidFill>
-          <a:ln>
-            <a:noFill/>
-          </a:ln>
-        </p:spPr>
-        <p:style>
-          <a:lnRef idx="1">
-            <a:schemeClr val="accent1"/>
-          </a:lnRef>
-          <a:fillRef idx="3">
-            <a:schemeClr val="accent1"/>
-          </a:fillRef>
-          <a:effectRef idx="2">
-            <a:schemeClr val="accent1"/>
-          </a:effectRef>
-          <a:fontRef idx="minor">
-            <a:schemeClr val="lt1"/>
-          </a:fontRef>
-        </p:style>
-        <p:txBody>
-          <a:bodyPr rtlCol="0" anchor="ctr"/>
-          <a:lstStyle/>
-          <a:p>
-            <a:pPr algn="ctr">
-              <a:defRPr sz="1000" b="1">
-                <a:solidFill>
-                  <a:srgbClr val="FFFFFF"/>
-                </a:solidFill>
-              </a:defRPr>
-            </a:pPr>
-            <a:r>
-              <a:t>ACADEMIC KEYNOTE PRESENTATION</a:t>
-            </a:r>
-          </a:p>
-        </p:txBody>
-      </p:sp>
-      <p:sp>
-        <p:nvSpPr>
-          <p:cNvPr id="4" name="TextBox 3"/>
+        </p:spPr>
+      </p:pic>
+      <p:sp>
+        <p:nvSpPr>
+          <p:cNvPr id="4" name="!!Title_Card"/>
           <p:cNvSpPr txBox="1"/>
           <p:nvPr/>
         </p:nvSpPr>
         <p:spPr>
           <a:xfrm>
-            <a:off x="731520" y="1828800"/>
-            <a:ext cx="10515600" cy="2011680"/>
+            <a:off x="731520" y="1463040"/>
+            <a:ext cx="5303520" cy="4114800"/>
           </a:xfrm>
           <a:prstGeom prst="rect">
             <a:avLst/>
@@ -4330,94 +4302,57 @@
           <a:noFill/>
         </p:spPr>
         <p:txBody>
-          <a:bodyPr wrap="none">
+          <a:bodyPr wrap="square">
             <a:spAutoFit/>
           </a:bodyPr>
           <a:lstStyle/>
           <a:p>
             <a:pPr>
-              <a:defRPr sz="4000" b="1">
+              <a:defRPr sz="1200" b="1">
+                <a:solidFill>
+                  <a:srgbClr val="34D399"/>
+                </a:solidFill>
+              </a:defRPr>
+            </a:pPr>
+            <a:r>
+              <a:t>VENTURE INVESTOR PITCH</a:t>
+            </a:r>
+          </a:p>
+          <a:p>
+            <a:pPr>
+              <a:defRPr sz="3600" b="1">
                 <a:solidFill>
                   <a:srgbClr val="FFFFFF"/>
                 </a:solidFill>
               </a:defRPr>
             </a:pPr>
             <a:r>
-              <a:t>UniTrade: The Campus Student Marketplace</a:t>
-            </a:r>
-          </a:p>
-        </p:txBody>
-      </p:sp>
-      <p:sp>
-        <p:nvSpPr>
-          <p:cNvPr id="5" name="TextBox 4"/>
-          <p:cNvSpPr txBox="1"/>
-          <p:nvPr/>
-        </p:nvSpPr>
-        <p:spPr>
-          <a:xfrm>
-            <a:off x="731520" y="3931920"/>
-            <a:ext cx="10515600" cy="914400"/>
-          </a:xfrm>
-          <a:prstGeom prst="rect">
-            <a:avLst/>
-          </a:prstGeom>
-          <a:noFill/>
-        </p:spPr>
-        <p:txBody>
-          <a:bodyPr wrap="none">
-            <a:spAutoFit/>
-          </a:bodyPr>
-          <a:lstStyle/>
+              <a:t>Campus Marketplace App</a:t>
+            </a:r>
+          </a:p>
           <a:p>
             <a:pPr>
-              <a:defRPr sz="2000">
-                <a:solidFill>
-                  <a:srgbClr val="10B981"/>
+              <a:defRPr sz="1500">
+                <a:solidFill>
+                  <a:srgbClr val="B4C8DC"/>
                 </a:solidFill>
               </a:defRPr>
             </a:pPr>
             <a:r>
-              <a:t>A Secure, Verified Peer-to-Peer Trading Platform for College Communities</a:t>
-            </a:r>
-          </a:p>
-        </p:txBody>
-      </p:sp>
-      <p:sp>
-        <p:nvSpPr>
-          <p:cNvPr id="6" name="TextBox 5"/>
-          <p:cNvSpPr txBox="1"/>
-          <p:nvPr/>
-        </p:nvSpPr>
-        <p:spPr>
-          <a:xfrm>
-            <a:off x="731520" y="5120640"/>
-            <a:ext cx="10515600" cy="914400"/>
-          </a:xfrm>
-          <a:prstGeom prst="rect">
-            <a:avLst/>
-          </a:prstGeom>
-          <a:noFill/>
-        </p:spPr>
-        <p:txBody>
-          <a:bodyPr wrap="none">
-            <a:spAutoFit/>
-          </a:bodyPr>
-          <a:lstStyle/>
-          <a:p>
+              <a:t>Peer-to-Peer Student Commerce Built for Trust, Safety, and Campus Velocity</a:t>
+            </a:r>
+          </a:p>
+          <a:p>
+            <a:br/>
             <a:pPr>
-              <a:defRPr sz="1400">
-                <a:solidFill>
-                  <a:srgbClr val="94A3B8"/>
+              <a:defRPr sz="1100">
+                <a:solidFill>
+                  <a:srgbClr val="8CA0B4"/>
                 </a:solidFill>
               </a:defRPr>
             </a:pPr>
             <a:r>
-              <a:t>Presented by: Jhon Paulo V. Gascon  •  BSIT 2G</a:t>
-            </a:r>
-            <a:br/>
-            <a:r>
-              <a:t>STI West Negros University  •  Academic Year 2026–2027</a:t>
+              <a:t>Presenter: Jhon Paulo Gascon • STI West Negros University</a:t>
             </a:r>
           </a:p>
         </p:txBody>
@@ -4427,14 +4362,14 @@
   <p:clrMapOvr>
     <a:masterClrMapping/>
   </p:clrMapOvr>
-  <p:transition spd="slow">
+  <p:transition spd="med">
     <p:fade/>
   </p:transition>
 </p:sld>
 </file>
 
 <file path=ppt/slides/slide10.xml><?xml version="1.0" encoding="utf-8"?>
-<p:sld xmlns:a="http://schemas.openxmlformats.org/drawingml/2006/main" xmlns:p="http://schemas.openxmlformats.org/presentationml/2006/main" xmlns:r="http://schemas.openxmlformats.org/officeDocument/2006/relationships">
+<p:sld xmlns:p14="http://schemas.microsoft.com/office/powerpoint/2010/main" xmlns:a="http://schemas.openxmlformats.org/drawingml/2006/main" xmlns:p="http://schemas.openxmlformats.org/presentationml/2006/main" xmlns:r="http://schemas.openxmlformats.org/officeDocument/2006/relationships">
   <p:cSld>
     <p:spTree>
       <p:nvGrpSpPr>
@@ -4458,7 +4393,7 @@
             <a:avLst/>
           </a:prstGeom>
           <a:solidFill>
-            <a:srgbClr val="0F172A"/>
+            <a:srgbClr val="062820"/>
           </a:solidFill>
           <a:ln>
             <a:noFill/>
@@ -4494,8 +4429,8 @@
         </p:nvSpPr>
         <p:spPr>
           <a:xfrm>
-            <a:off x="731520" y="365760"/>
-            <a:ext cx="10058400" cy="365760"/>
+            <a:off x="731520" y="457200"/>
+            <a:ext cx="10698480" cy="1005840"/>
           </a:xfrm>
           <a:prstGeom prst="rect">
             <a:avLst/>
@@ -4503,7 +4438,7 @@
           <a:noFill/>
         </p:spPr>
         <p:txBody>
-          <a:bodyPr wrap="none">
+          <a:bodyPr wrap="square">
             <a:spAutoFit/>
           </a:bodyPr>
           <a:lstStyle/>
@@ -4511,106 +4446,48 @@
             <a:pPr>
               <a:defRPr sz="1100" b="1">
                 <a:solidFill>
-                  <a:srgbClr val="10B981"/>
+                  <a:srgbClr val="34D399"/>
                 </a:solidFill>
               </a:defRPr>
             </a:pPr>
             <a:r>
-              <a:t>FINAL INSIGHTS</a:t>
-            </a:r>
-          </a:p>
-        </p:txBody>
-      </p:sp>
-      <p:sp>
-        <p:nvSpPr>
-          <p:cNvPr id="4" name="TextBox 3"/>
-          <p:cNvSpPr txBox="1"/>
-          <p:nvPr/>
-        </p:nvSpPr>
-        <p:spPr>
-          <a:xfrm>
-            <a:off x="731520" y="685800"/>
-            <a:ext cx="10515600" cy="731520"/>
-          </a:xfrm>
-          <a:prstGeom prst="rect">
-            <a:avLst/>
-          </a:prstGeom>
-          <a:noFill/>
-        </p:spPr>
-        <p:txBody>
-          <a:bodyPr wrap="none">
-            <a:spAutoFit/>
-          </a:bodyPr>
-          <a:lstStyle/>
+              <a:t>SEED ROUND</a:t>
+            </a:r>
+          </a:p>
           <a:p>
             <a:pPr>
-              <a:defRPr sz="2600" b="1">
+              <a:defRPr sz="2400" b="1">
                 <a:solidFill>
                   <a:srgbClr val="FFFFFF"/>
                 </a:solidFill>
               </a:defRPr>
             </a:pPr>
             <a:r>
-              <a:t>Investment Summary &amp; Value Proposition</a:t>
-            </a:r>
-          </a:p>
-        </p:txBody>
-      </p:sp>
-      <p:sp>
-        <p:nvSpPr>
-          <p:cNvPr id="5" name="TextBox 4"/>
-          <p:cNvSpPr txBox="1"/>
-          <p:nvPr/>
-        </p:nvSpPr>
-        <p:spPr>
-          <a:xfrm>
-            <a:off x="731520" y="6400800"/>
-            <a:ext cx="10728655" cy="320040"/>
-          </a:xfrm>
-          <a:prstGeom prst="rect">
-            <a:avLst/>
-          </a:prstGeom>
-          <a:noFill/>
-        </p:spPr>
-        <p:txBody>
-          <a:bodyPr wrap="none">
-            <a:spAutoFit/>
-          </a:bodyPr>
-          <a:lstStyle/>
-          <a:p>
-            <a:pPr>
-              <a:defRPr sz="900">
-                <a:solidFill>
-                  <a:srgbClr val="94A3B8"/>
-                </a:solidFill>
-              </a:defRPr>
-            </a:pPr>
-            <a:r>
-              <a:t>STI West Negros University  •  Jhon Paulo V. Gascon  •  Slide 10 of 11</a:t>
-            </a:r>
-          </a:p>
-        </p:txBody>
-      </p:sp>
-      <p:sp>
-        <p:nvSpPr>
-          <p:cNvPr id="6" name="Rounded Rectangle 5"/>
+              <a:t>The Investment Opportunity</a:t>
+            </a:r>
+          </a:p>
+        </p:txBody>
+      </p:sp>
+      <p:sp>
+        <p:nvSpPr>
+          <p:cNvPr id="4" name="!!Card_1"/>
           <p:cNvSpPr/>
           <p:nvPr/>
         </p:nvSpPr>
         <p:spPr>
           <a:xfrm>
-            <a:off x="731520" y="1828800"/>
-            <a:ext cx="10728655" cy="1188720"/>
+            <a:off x="731520" y="1645920"/>
+            <a:ext cx="3291840" cy="4114800"/>
           </a:xfrm>
           <a:prstGeom prst="roundRect">
             <a:avLst/>
           </a:prstGeom>
           <a:solidFill>
-            <a:srgbClr val="1E293B"/>
+            <a:srgbClr val="0C3C30"/>
           </a:solidFill>
           <a:ln w="19050">
             <a:solidFill>
-              <a:srgbClr val="10B981"/>
+              <a:srgbClr val="34D399"/>
             </a:solidFill>
           </a:ln>
         </p:spPr>
@@ -4629,83 +4506,54 @@
           </a:fontRef>
         </p:style>
         <p:txBody>
-          <a:bodyPr rtlCol="0" anchor="ctr"/>
-          <a:lstStyle/>
-          <a:p>
-            <a:pPr algn="ctr"/>
-          </a:p>
-        </p:txBody>
-      </p:sp>
-      <p:sp>
-        <p:nvSpPr>
-          <p:cNvPr id="7" name="TextBox 6"/>
-          <p:cNvSpPr txBox="1"/>
-          <p:nvPr/>
-        </p:nvSpPr>
-        <p:spPr>
-          <a:xfrm>
-            <a:off x="1005840" y="2011680"/>
-            <a:ext cx="10241280" cy="822960"/>
-          </a:xfrm>
-          <a:prstGeom prst="rect">
-            <a:avLst/>
-          </a:prstGeom>
-          <a:noFill/>
-        </p:spPr>
-        <p:txBody>
-          <a:bodyPr wrap="square">
-            <a:spAutoFit/>
-          </a:bodyPr>
-          <a:lstStyle/>
+          <a:bodyPr rtlCol="0" anchor="ctr" wrap="square"/>
+          <a:lstStyle/>
+          <a:p>
+            <a:pPr algn="ctr">
+              <a:defRPr b="1" sz="1500">
+                <a:solidFill>
+                  <a:srgbClr val="34D399"/>
+                </a:solidFill>
+              </a:defRPr>
+            </a:pPr>
+            <a:r>
+              <a:t>₱2.5M Seed Ask</a:t>
+            </a:r>
+          </a:p>
           <a:p>
             <a:pPr>
-              <a:defRPr sz="1800" b="1">
-                <a:solidFill>
-                  <a:srgbClr val="10B981"/>
+              <a:defRPr sz="1100">
+                <a:solidFill>
+                  <a:srgbClr val="F0F0F0"/>
                 </a:solidFill>
               </a:defRPr>
             </a:pPr>
             <a:r>
-              <a:t>High Retention Loop</a:t>
-            </a:r>
-          </a:p>
-          <a:p>
-            <a:pPr>
-              <a:spcBef>
-                <a:spcPts val="300"/>
-              </a:spcBef>
-              <a:defRPr sz="1300">
-                <a:solidFill>
-                  <a:srgbClr val="FFFFFF"/>
-                </a:solidFill>
-              </a:defRPr>
-            </a:pPr>
-            <a:r>
-              <a:t>Students trade each semester during textbook changes and graduation cleanouts.</a:t>
-            </a:r>
-          </a:p>
-        </p:txBody>
-      </p:sp>
-      <p:sp>
-        <p:nvSpPr>
-          <p:cNvPr id="8" name="Rounded Rectangle 7"/>
+              <a:t>18-month runway to fund AWS cloud architecture, mobile iOS deployment, and student marketing ambassadors.</a:t>
+            </a:r>
+          </a:p>
+        </p:txBody>
+      </p:sp>
+      <p:sp>
+        <p:nvSpPr>
+          <p:cNvPr id="5" name="!!Card_2"/>
           <p:cNvSpPr/>
           <p:nvPr/>
         </p:nvSpPr>
         <p:spPr>
           <a:xfrm>
-            <a:off x="731520" y="3200400"/>
-            <a:ext cx="10728655" cy="1188720"/>
+            <a:off x="4389120" y="1645920"/>
+            <a:ext cx="3291840" cy="4114800"/>
           </a:xfrm>
           <a:prstGeom prst="roundRect">
             <a:avLst/>
           </a:prstGeom>
           <a:solidFill>
-            <a:srgbClr val="1E293B"/>
+            <a:srgbClr val="0C3C30"/>
           </a:solidFill>
           <a:ln w="19050">
             <a:solidFill>
-              <a:srgbClr val="10B981"/>
+              <a:srgbClr val="34D399"/>
             </a:solidFill>
           </a:ln>
         </p:spPr>
@@ -4724,83 +4572,54 @@
           </a:fontRef>
         </p:style>
         <p:txBody>
-          <a:bodyPr rtlCol="0" anchor="ctr"/>
-          <a:lstStyle/>
-          <a:p>
-            <a:pPr algn="ctr"/>
-          </a:p>
-        </p:txBody>
-      </p:sp>
-      <p:sp>
-        <p:nvSpPr>
-          <p:cNvPr id="9" name="TextBox 8"/>
-          <p:cNvSpPr txBox="1"/>
-          <p:nvPr/>
-        </p:nvSpPr>
-        <p:spPr>
-          <a:xfrm>
-            <a:off x="1005840" y="3383280"/>
-            <a:ext cx="10241280" cy="822960"/>
-          </a:xfrm>
-          <a:prstGeom prst="rect">
-            <a:avLst/>
-          </a:prstGeom>
-          <a:noFill/>
-        </p:spPr>
-        <p:txBody>
-          <a:bodyPr wrap="square">
-            <a:spAutoFit/>
-          </a:bodyPr>
-          <a:lstStyle/>
+          <a:bodyPr rtlCol="0" anchor="ctr" wrap="square"/>
+          <a:lstStyle/>
+          <a:p>
+            <a:pPr algn="ctr">
+              <a:defRPr b="1" sz="1500">
+                <a:solidFill>
+                  <a:srgbClr val="34D399"/>
+                </a:solidFill>
+              </a:defRPr>
+            </a:pPr>
+            <a:r>
+              <a:t>Key Growth Targets</a:t>
+            </a:r>
+          </a:p>
           <a:p>
             <a:pPr>
-              <a:defRPr sz="1800" b="1">
-                <a:solidFill>
-                  <a:srgbClr val="10B981"/>
+              <a:defRPr sz="1100">
+                <a:solidFill>
+                  <a:srgbClr val="F0F0F0"/>
                 </a:solidFill>
               </a:defRPr>
             </a:pPr>
             <a:r>
-              <a:t>Low Customer Acquisition Cost</a:t>
-            </a:r>
-          </a:p>
-          <a:p>
-            <a:pPr>
-              <a:spcBef>
-                <a:spcPts val="300"/>
-              </a:spcBef>
-              <a:defRPr sz="1300">
-                <a:solidFill>
-                  <a:srgbClr val="FFFFFF"/>
-                </a:solidFill>
-              </a:defRPr>
-            </a:pPr>
-            <a:r>
-              <a:t>Direct campus influencer circles and university club partnerships.</a:t>
-            </a:r>
-          </a:p>
-        </p:txBody>
-      </p:sp>
-      <p:sp>
-        <p:nvSpPr>
-          <p:cNvPr id="10" name="Rounded Rectangle 9"/>
+              <a:t>50,000 registered users, ₱25M annualized GMV, and break-even unit economics by Month 14.</a:t>
+            </a:r>
+          </a:p>
+        </p:txBody>
+      </p:sp>
+      <p:sp>
+        <p:nvSpPr>
+          <p:cNvPr id="6" name="!!Card_3"/>
           <p:cNvSpPr/>
           <p:nvPr/>
         </p:nvSpPr>
         <p:spPr>
           <a:xfrm>
-            <a:off x="731520" y="4572000"/>
-            <a:ext cx="10728655" cy="1188720"/>
+            <a:off x="8046720" y="1645920"/>
+            <a:ext cx="3291840" cy="4114800"/>
           </a:xfrm>
           <a:prstGeom prst="roundRect">
             <a:avLst/>
           </a:prstGeom>
           <a:solidFill>
-            <a:srgbClr val="1E293B"/>
+            <a:srgbClr val="0C3C30"/>
           </a:solidFill>
           <a:ln w="19050">
             <a:solidFill>
-              <a:srgbClr val="10B981"/>
+              <a:srgbClr val="34D399"/>
             </a:solidFill>
           </a:ln>
         </p:spPr>
@@ -4819,59 +4638,30 @@
           </a:fontRef>
         </p:style>
         <p:txBody>
-          <a:bodyPr rtlCol="0" anchor="ctr"/>
-          <a:lstStyle/>
-          <a:p>
-            <a:pPr algn="ctr"/>
-          </a:p>
-        </p:txBody>
-      </p:sp>
-      <p:sp>
-        <p:nvSpPr>
-          <p:cNvPr id="11" name="TextBox 10"/>
-          <p:cNvSpPr txBox="1"/>
-          <p:nvPr/>
-        </p:nvSpPr>
-        <p:spPr>
-          <a:xfrm>
-            <a:off x="1005840" y="4754880"/>
-            <a:ext cx="10241280" cy="822960"/>
-          </a:xfrm>
-          <a:prstGeom prst="rect">
-            <a:avLst/>
-          </a:prstGeom>
-          <a:noFill/>
-        </p:spPr>
-        <p:txBody>
-          <a:bodyPr wrap="square">
-            <a:spAutoFit/>
-          </a:bodyPr>
-          <a:lstStyle/>
+          <a:bodyPr rtlCol="0" anchor="ctr" wrap="square"/>
+          <a:lstStyle/>
+          <a:p>
+            <a:pPr algn="ctr">
+              <a:defRPr b="1" sz="1500">
+                <a:solidFill>
+                  <a:srgbClr val="34D399"/>
+                </a:solidFill>
+              </a:defRPr>
+            </a:pPr>
+            <a:r>
+              <a:t>Founding Team Mastery</a:t>
+            </a:r>
+          </a:p>
           <a:p>
             <a:pPr>
-              <a:defRPr sz="1800" b="1">
-                <a:solidFill>
-                  <a:srgbClr val="10B981"/>
+              <a:defRPr sz="1100">
+                <a:solidFill>
+                  <a:srgbClr val="F0F0F0"/>
                 </a:solidFill>
               </a:defRPr>
             </a:pPr>
             <a:r>
-              <a:t>Scalable Multi-Campus Model</a:t>
-            </a:r>
-          </a:p>
-          <a:p>
-            <a:pPr>
-              <a:spcBef>
-                <a:spcPts val="300"/>
-              </a:spcBef>
-              <a:defRPr sz="1300">
-                <a:solidFill>
-                  <a:srgbClr val="FFFFFF"/>
-                </a:solidFill>
-              </a:defRPr>
-            </a:pPr>
-            <a:r>
-              <a:t>Easily deployed to sister STI and collegiate campuses nationwide.</a:t>
+              <a:t>Built by passionate BSIT software engineers and student leaders deeply embedded in university culture.</a:t>
             </a:r>
           </a:p>
         </p:txBody>
@@ -4888,7 +4678,7 @@
 </file>
 
 <file path=ppt/slides/slide11.xml><?xml version="1.0" encoding="utf-8"?>
-<p:sld xmlns:a="http://schemas.openxmlformats.org/drawingml/2006/main" xmlns:p="http://schemas.openxmlformats.org/presentationml/2006/main" xmlns:r="http://schemas.openxmlformats.org/officeDocument/2006/relationships">
+<p:sld xmlns:p14="http://schemas.microsoft.com/office/powerpoint/2010/main" xmlns:a="http://schemas.openxmlformats.org/drawingml/2006/main" xmlns:p="http://schemas.openxmlformats.org/presentationml/2006/main" xmlns:r="http://schemas.openxmlformats.org/officeDocument/2006/relationships">
   <p:cSld>
     <p:spTree>
       <p:nvGrpSpPr>
@@ -4912,7 +4702,7 @@
             <a:avLst/>
           </a:prstGeom>
           <a:solidFill>
-            <a:srgbClr val="0F172A"/>
+            <a:srgbClr val="062820"/>
           </a:solidFill>
           <a:ln>
             <a:noFill/>
@@ -4940,16 +4730,40 @@
           </a:p>
         </p:txBody>
       </p:sp>
-      <p:sp>
-        <p:nvSpPr>
-          <p:cNvPr id="3" name="TextBox 2"/>
+      <p:pic>
+        <p:nvPicPr>
+          <p:cNvPr id="3" name="!!Hero_Image" descr="market_closing.png"/>
+          <p:cNvPicPr>
+            <a:picLocks noChangeAspect="1"/>
+          </p:cNvPicPr>
+          <p:nvPr/>
+        </p:nvPicPr>
+        <p:blipFill>
+          <a:blip r:embed="rId2"/>
+          <a:stretch>
+            <a:fillRect/>
+          </a:stretch>
+        </p:blipFill>
+        <p:spPr>
+          <a:xfrm>
+            <a:off x="6217920" y="731520"/>
+            <a:ext cx="5303520" cy="5394960"/>
+          </a:xfrm>
+          <a:prstGeom prst="rect">
+            <a:avLst/>
+          </a:prstGeom>
+        </p:spPr>
+      </p:pic>
+      <p:sp>
+        <p:nvSpPr>
+          <p:cNvPr id="4" name="!!Title_Card"/>
           <p:cNvSpPr txBox="1"/>
           <p:nvPr/>
         </p:nvSpPr>
         <p:spPr>
           <a:xfrm>
-            <a:off x="731520" y="365760"/>
-            <a:ext cx="10058400" cy="365760"/>
+            <a:off x="731520" y="1463040"/>
+            <a:ext cx="5303520" cy="4114800"/>
           </a:xfrm>
           <a:prstGeom prst="rect">
             <a:avLst/>
@@ -4957,812 +4771,57 @@
           <a:noFill/>
         </p:spPr>
         <p:txBody>
-          <a:bodyPr wrap="none">
-            <a:spAutoFit/>
-          </a:bodyPr>
-          <a:lstStyle/>
-          <a:p>
-            <a:pPr>
-              <a:defRPr sz="1100" b="1">
-                <a:solidFill>
-                  <a:srgbClr val="10B981"/>
-                </a:solidFill>
-              </a:defRPr>
-            </a:pPr>
-            <a:r>
-              <a:t>SCHOLARLY DOCUMENTATION</a:t>
-            </a:r>
-          </a:p>
-        </p:txBody>
-      </p:sp>
-      <p:sp>
-        <p:nvSpPr>
-          <p:cNvPr id="4" name="TextBox 3"/>
-          <p:cNvSpPr txBox="1"/>
-          <p:nvPr/>
-        </p:nvSpPr>
-        <p:spPr>
-          <a:xfrm>
-            <a:off x="731520" y="685800"/>
-            <a:ext cx="10515600" cy="731520"/>
-          </a:xfrm>
-          <a:prstGeom prst="rect">
-            <a:avLst/>
-          </a:prstGeom>
-          <a:noFill/>
-        </p:spPr>
-        <p:txBody>
-          <a:bodyPr wrap="none">
-            <a:spAutoFit/>
-          </a:bodyPr>
-          <a:lstStyle/>
-          <a:p>
-            <a:pPr>
-              <a:defRPr sz="2600" b="1">
-                <a:solidFill>
-                  <a:srgbClr val="FFFFFF"/>
-                </a:solidFill>
-              </a:defRPr>
-            </a:pPr>
-            <a:r>
-              <a:t>Market Validation &amp; Demographic Citations</a:t>
-            </a:r>
-          </a:p>
-        </p:txBody>
-      </p:sp>
-      <p:sp>
-        <p:nvSpPr>
-          <p:cNvPr id="5" name="TextBox 4"/>
-          <p:cNvSpPr txBox="1"/>
-          <p:nvPr/>
-        </p:nvSpPr>
-        <p:spPr>
-          <a:xfrm>
-            <a:off x="731520" y="6400800"/>
-            <a:ext cx="10728655" cy="320040"/>
-          </a:xfrm>
-          <a:prstGeom prst="rect">
-            <a:avLst/>
-          </a:prstGeom>
-          <a:noFill/>
-        </p:spPr>
-        <p:txBody>
-          <a:bodyPr wrap="none">
-            <a:spAutoFit/>
-          </a:bodyPr>
-          <a:lstStyle/>
-          <a:p>
-            <a:pPr>
-              <a:defRPr sz="900">
-                <a:solidFill>
-                  <a:srgbClr val="94A3B8"/>
-                </a:solidFill>
-              </a:defRPr>
-            </a:pPr>
-            <a:r>
-              <a:t>STI West Negros University  •  Jhon Paulo V. Gascon  •  Slide 11 of 11</a:t>
-            </a:r>
-          </a:p>
-        </p:txBody>
-      </p:sp>
-      <p:sp>
-        <p:nvSpPr>
-          <p:cNvPr id="6" name="Rounded Rectangle 5"/>
-          <p:cNvSpPr/>
-          <p:nvPr/>
-        </p:nvSpPr>
-        <p:spPr>
-          <a:xfrm>
-            <a:off x="731520" y="1828800"/>
-            <a:ext cx="10728655" cy="4114800"/>
-          </a:xfrm>
-          <a:prstGeom prst="roundRect">
-            <a:avLst/>
-          </a:prstGeom>
-          <a:solidFill>
-            <a:srgbClr val="1E293B"/>
-          </a:solidFill>
-          <a:ln w="12700">
-            <a:solidFill>
-              <a:srgbClr val="94A3B8"/>
-            </a:solidFill>
-          </a:ln>
-        </p:spPr>
-        <p:style>
-          <a:lnRef idx="1">
-            <a:schemeClr val="accent1"/>
-          </a:lnRef>
-          <a:fillRef idx="3">
-            <a:schemeClr val="accent1"/>
-          </a:fillRef>
-          <a:effectRef idx="2">
-            <a:schemeClr val="accent1"/>
-          </a:effectRef>
-          <a:fontRef idx="minor">
-            <a:schemeClr val="lt1"/>
-          </a:fontRef>
-        </p:style>
-        <p:txBody>
-          <a:bodyPr rtlCol="0" anchor="ctr"/>
-          <a:lstStyle/>
-          <a:p>
-            <a:pPr algn="ctr"/>
-          </a:p>
-        </p:txBody>
-      </p:sp>
-      <p:sp>
-        <p:nvSpPr>
-          <p:cNvPr id="7" name="TextBox 6"/>
-          <p:cNvSpPr txBox="1"/>
-          <p:nvPr/>
-        </p:nvSpPr>
-        <p:spPr>
-          <a:xfrm>
-            <a:off x="1097280" y="2103120"/>
-            <a:ext cx="10058400" cy="3566160"/>
-          </a:xfrm>
-          <a:prstGeom prst="rect">
-            <a:avLst/>
-          </a:prstGeom>
-          <a:noFill/>
-        </p:spPr>
-        <p:txBody>
           <a:bodyPr wrap="square">
             <a:spAutoFit/>
           </a:bodyPr>
           <a:lstStyle/>
           <a:p>
             <a:pPr>
-              <a:spcBef>
-                <a:spcPts val="1400"/>
-              </a:spcBef>
-              <a:defRPr sz="1300">
+              <a:defRPr sz="3200" b="1">
                 <a:solidFill>
                   <a:srgbClr val="FFFFFF"/>
                 </a:solidFill>
               </a:defRPr>
             </a:pPr>
             <a:r>
-              <a:t>•  Commission on Higher Education. (2023). Western Visayas higher education enrollment statistical compendium. CHED Region VI.</a:t>
+              <a:t>Join the Campus Revolution</a:t>
             </a:r>
           </a:p>
           <a:p>
             <a:pPr>
-              <a:spcBef>
-                <a:spcPts val="1400"/>
-              </a:spcBef>
-              <a:defRPr sz="1300">
-                <a:solidFill>
-                  <a:srgbClr val="FFFFFF"/>
+              <a:defRPr sz="1400">
+                <a:solidFill>
+                  <a:srgbClr val="34D399"/>
                 </a:solidFill>
               </a:defRPr>
             </a:pPr>
             <a:r>
-              <a:t>•  Statista Research. (2023). Peer-to-peer e-commerce and second-hand marketplace adoption among Gen Z consumers. Statista Reports.</a:t>
-            </a:r>
-          </a:p>
-          <a:p>
+              <a:t>Safe, Fast, and Trusted Collegiate Commerce for Every Student</a:t>
+            </a:r>
+          </a:p>
+          <a:p>
+            <a:br/>
             <a:pPr>
-              <a:spcBef>
-                <a:spcPts val="1400"/>
-              </a:spcBef>
-              <a:defRPr sz="1300">
-                <a:solidFill>
-                  <a:srgbClr val="FFFFFF"/>
+              <a:defRPr sz="1000">
+                <a:solidFill>
+                  <a:srgbClr val="96AABE"/>
                 </a:solidFill>
               </a:defRPr>
             </a:pPr>
             <a:r>
-              <a:t>•  We Are Social &amp; Meltwater. (2024). Digital 2024: The Philippines e-commerce overview. Global Digital Insights.</a:t>
-            </a:r>
-          </a:p>
-        </p:txBody>
-      </p:sp>
-    </p:spTree>
-  </p:cSld>
-  <p:clrMapOvr>
-    <a:masterClrMapping/>
-  </p:clrMapOvr>
-  <p:transition spd="slow">
-    <p:fade/>
-  </p:transition>
-</p:sld>
-</file>
-
-<file path=ppt/slides/slide2.xml><?xml version="1.0" encoding="utf-8"?>
-<p:sld xmlns:a="http://schemas.openxmlformats.org/drawingml/2006/main" xmlns:p="http://schemas.openxmlformats.org/presentationml/2006/main" xmlns:r="http://schemas.openxmlformats.org/officeDocument/2006/relationships">
-  <p:cSld>
-    <p:spTree>
-      <p:nvGrpSpPr>
-        <p:cNvPr id="1" name=""/>
-        <p:cNvGrpSpPr/>
-        <p:nvPr/>
-      </p:nvGrpSpPr>
-      <p:grpSpPr/>
-      <p:sp>
-        <p:nvSpPr>
-          <p:cNvPr id="2" name="Rectangle 1"/>
-          <p:cNvSpPr/>
-          <p:nvPr/>
-        </p:nvSpPr>
-        <p:spPr>
-          <a:xfrm>
-            <a:off x="0" y="0"/>
-            <a:ext cx="12191695" cy="6858000"/>
-          </a:xfrm>
-          <a:prstGeom prst="rect">
-            <a:avLst/>
-          </a:prstGeom>
-          <a:solidFill>
-            <a:srgbClr val="0F172A"/>
-          </a:solidFill>
-          <a:ln>
-            <a:noFill/>
-          </a:ln>
-        </p:spPr>
-        <p:style>
-          <a:lnRef idx="1">
-            <a:schemeClr val="accent1"/>
-          </a:lnRef>
-          <a:fillRef idx="3">
-            <a:schemeClr val="accent1"/>
-          </a:fillRef>
-          <a:effectRef idx="2">
-            <a:schemeClr val="accent1"/>
-          </a:effectRef>
-          <a:fontRef idx="minor">
-            <a:schemeClr val="lt1"/>
-          </a:fontRef>
-        </p:style>
-        <p:txBody>
-          <a:bodyPr rtlCol="0" anchor="ctr"/>
-          <a:lstStyle/>
-          <a:p>
-            <a:pPr algn="ctr"/>
-          </a:p>
-        </p:txBody>
-      </p:sp>
-      <p:sp>
-        <p:nvSpPr>
-          <p:cNvPr id="3" name="TextBox 2"/>
-          <p:cNvSpPr txBox="1"/>
-          <p:nvPr/>
-        </p:nvSpPr>
-        <p:spPr>
-          <a:xfrm>
-            <a:off x="731520" y="365760"/>
-            <a:ext cx="10058400" cy="365760"/>
-          </a:xfrm>
-          <a:prstGeom prst="rect">
-            <a:avLst/>
-          </a:prstGeom>
-          <a:noFill/>
-        </p:spPr>
-        <p:txBody>
-          <a:bodyPr wrap="none">
-            <a:spAutoFit/>
-          </a:bodyPr>
-          <a:lstStyle/>
-          <a:p>
-            <a:pPr>
-              <a:defRPr sz="1100" b="1">
-                <a:solidFill>
-                  <a:srgbClr val="10B981"/>
-                </a:solidFill>
-              </a:defRPr>
-            </a:pPr>
-            <a:r>
-              <a:t>STRUCTURE &amp; OVERVIEW</a:t>
-            </a:r>
-          </a:p>
-        </p:txBody>
-      </p:sp>
-      <p:sp>
-        <p:nvSpPr>
-          <p:cNvPr id="4" name="TextBox 3"/>
-          <p:cNvSpPr txBox="1"/>
-          <p:nvPr/>
-        </p:nvSpPr>
-        <p:spPr>
-          <a:xfrm>
-            <a:off x="731520" y="685800"/>
-            <a:ext cx="10515600" cy="731520"/>
-          </a:xfrm>
-          <a:prstGeom prst="rect">
-            <a:avLst/>
-          </a:prstGeom>
-          <a:noFill/>
-        </p:spPr>
-        <p:txBody>
-          <a:bodyPr wrap="none">
-            <a:spAutoFit/>
-          </a:bodyPr>
-          <a:lstStyle/>
-          <a:p>
-            <a:pPr>
-              <a:defRPr sz="2600" b="1">
-                <a:solidFill>
-                  <a:srgbClr val="FFFFFF"/>
-                </a:solidFill>
-              </a:defRPr>
-            </a:pPr>
-            <a:r>
-              <a:t>Pitch Deck Roadmap</a:t>
-            </a:r>
-          </a:p>
-        </p:txBody>
-      </p:sp>
-      <p:sp>
-        <p:nvSpPr>
-          <p:cNvPr id="5" name="TextBox 4"/>
-          <p:cNvSpPr txBox="1"/>
-          <p:nvPr/>
-        </p:nvSpPr>
-        <p:spPr>
-          <a:xfrm>
-            <a:off x="731520" y="6400800"/>
-            <a:ext cx="10728655" cy="320040"/>
-          </a:xfrm>
-          <a:prstGeom prst="rect">
-            <a:avLst/>
-          </a:prstGeom>
-          <a:noFill/>
-        </p:spPr>
-        <p:txBody>
-          <a:bodyPr wrap="none">
-            <a:spAutoFit/>
-          </a:bodyPr>
-          <a:lstStyle/>
-          <a:p>
-            <a:pPr>
-              <a:defRPr sz="900">
-                <a:solidFill>
-                  <a:srgbClr val="94A3B8"/>
-                </a:solidFill>
-              </a:defRPr>
-            </a:pPr>
-            <a:r>
-              <a:t>STI West Negros University  •  Jhon Paulo V. Gascon  •  Slide 2 of 11</a:t>
-            </a:r>
-          </a:p>
-        </p:txBody>
-      </p:sp>
-      <p:sp>
-        <p:nvSpPr>
-          <p:cNvPr id="6" name="Rounded Rectangle 5"/>
-          <p:cNvSpPr/>
-          <p:nvPr/>
-        </p:nvSpPr>
-        <p:spPr>
-          <a:xfrm>
-            <a:off x="731520" y="1828800"/>
-            <a:ext cx="2514600" cy="4114800"/>
-          </a:xfrm>
-          <a:prstGeom prst="roundRect">
-            <a:avLst/>
-          </a:prstGeom>
-          <a:solidFill>
-            <a:srgbClr val="1E293B"/>
-          </a:solidFill>
-          <a:ln w="19050">
-            <a:solidFill>
-              <a:srgbClr val="10B981"/>
-            </a:solidFill>
-          </a:ln>
-        </p:spPr>
-        <p:style>
-          <a:lnRef idx="1">
-            <a:schemeClr val="accent1"/>
-          </a:lnRef>
-          <a:fillRef idx="3">
-            <a:schemeClr val="accent1"/>
-          </a:fillRef>
-          <a:effectRef idx="2">
-            <a:schemeClr val="accent1"/>
-          </a:effectRef>
-          <a:fontRef idx="minor">
-            <a:schemeClr val="lt1"/>
-          </a:fontRef>
-        </p:style>
-        <p:txBody>
-          <a:bodyPr rtlCol="0" anchor="ctr"/>
-          <a:lstStyle/>
-          <a:p>
-            <a:pPr algn="ctr"/>
-          </a:p>
-        </p:txBody>
-      </p:sp>
-      <p:sp>
-        <p:nvSpPr>
-          <p:cNvPr id="7" name="TextBox 6"/>
-          <p:cNvSpPr txBox="1"/>
-          <p:nvPr/>
-        </p:nvSpPr>
-        <p:spPr>
-          <a:xfrm>
-            <a:off x="914400" y="2103120"/>
-            <a:ext cx="2148840" cy="3474720"/>
-          </a:xfrm>
-          <a:prstGeom prst="rect">
-            <a:avLst/>
-          </a:prstGeom>
-          <a:noFill/>
-        </p:spPr>
-        <p:txBody>
-          <a:bodyPr wrap="square">
-            <a:spAutoFit/>
-          </a:bodyPr>
-          <a:lstStyle/>
-          <a:p>
-            <a:pPr>
-              <a:defRPr sz="3600" b="1">
-                <a:solidFill>
-                  <a:srgbClr val="10B981"/>
-                </a:solidFill>
-              </a:defRPr>
-            </a:pPr>
-            <a:r>
-              <a:t>01</a:t>
-            </a:r>
-          </a:p>
-          <a:p>
-            <a:pPr>
-              <a:spcBef>
-                <a:spcPts val="1400"/>
-              </a:spcBef>
-              <a:defRPr sz="1600" b="1">
-                <a:solidFill>
-                  <a:srgbClr val="FFFFFF"/>
-                </a:solidFill>
-              </a:defRPr>
-            </a:pPr>
-            <a:r>
-              <a:t>The Student Commerce Problem</a:t>
-            </a:r>
-          </a:p>
-          <a:p>
-            <a:pPr>
-              <a:spcBef>
-                <a:spcPts val="1000"/>
-              </a:spcBef>
-              <a:defRPr sz="1300">
-                <a:solidFill>
-                  <a:srgbClr val="94A3B8"/>
-                </a:solidFill>
-              </a:defRPr>
-            </a:pPr>
-            <a:r>
-              <a:t>Unsafe public meetups and rampant Facebook marketplace scams</a:t>
-            </a:r>
-          </a:p>
-        </p:txBody>
-      </p:sp>
-      <p:sp>
-        <p:nvSpPr>
-          <p:cNvPr id="8" name="Rounded Rectangle 7"/>
-          <p:cNvSpPr/>
-          <p:nvPr/>
-        </p:nvSpPr>
-        <p:spPr>
-          <a:xfrm>
-            <a:off x="3429000" y="1828800"/>
-            <a:ext cx="2514600" cy="4114800"/>
-          </a:xfrm>
-          <a:prstGeom prst="roundRect">
-            <a:avLst/>
-          </a:prstGeom>
-          <a:solidFill>
-            <a:srgbClr val="1E293B"/>
-          </a:solidFill>
-          <a:ln w="19050">
-            <a:solidFill>
-              <a:srgbClr val="10B981"/>
-            </a:solidFill>
-          </a:ln>
-        </p:spPr>
-        <p:style>
-          <a:lnRef idx="1">
-            <a:schemeClr val="accent1"/>
-          </a:lnRef>
-          <a:fillRef idx="3">
-            <a:schemeClr val="accent1"/>
-          </a:fillRef>
-          <a:effectRef idx="2">
-            <a:schemeClr val="accent1"/>
-          </a:effectRef>
-          <a:fontRef idx="minor">
-            <a:schemeClr val="lt1"/>
-          </a:fontRef>
-        </p:style>
-        <p:txBody>
-          <a:bodyPr rtlCol="0" anchor="ctr"/>
-          <a:lstStyle/>
-          <a:p>
-            <a:pPr algn="ctr"/>
-          </a:p>
-        </p:txBody>
-      </p:sp>
-      <p:sp>
-        <p:nvSpPr>
-          <p:cNvPr id="9" name="TextBox 8"/>
-          <p:cNvSpPr txBox="1"/>
-          <p:nvPr/>
-        </p:nvSpPr>
-        <p:spPr>
-          <a:xfrm>
-            <a:off x="3611880" y="2103120"/>
-            <a:ext cx="2148840" cy="3474720"/>
-          </a:xfrm>
-          <a:prstGeom prst="rect">
-            <a:avLst/>
-          </a:prstGeom>
-          <a:noFill/>
-        </p:spPr>
-        <p:txBody>
-          <a:bodyPr wrap="square">
-            <a:spAutoFit/>
-          </a:bodyPr>
-          <a:lstStyle/>
-          <a:p>
-            <a:pPr>
-              <a:defRPr sz="3600" b="1">
-                <a:solidFill>
-                  <a:srgbClr val="10B981"/>
-                </a:solidFill>
-              </a:defRPr>
-            </a:pPr>
-            <a:r>
-              <a:t>02</a:t>
-            </a:r>
-          </a:p>
-          <a:p>
-            <a:pPr>
-              <a:spcBef>
-                <a:spcPts val="1400"/>
-              </a:spcBef>
-              <a:defRPr sz="1600" b="1">
-                <a:solidFill>
-                  <a:srgbClr val="FFFFFF"/>
-                </a:solidFill>
-              </a:defRPr>
-            </a:pPr>
-            <a:r>
-              <a:t>The UniTrade Solution</a:t>
-            </a:r>
-          </a:p>
-          <a:p>
-            <a:pPr>
-              <a:spcBef>
-                <a:spcPts val="1000"/>
-              </a:spcBef>
-              <a:defRPr sz="1300">
-                <a:solidFill>
-                  <a:srgbClr val="94A3B8"/>
-                </a:solidFill>
-              </a:defRPr>
-            </a:pPr>
-            <a:r>
-              <a:t>Verified student IDs, in-campus trading lockers, and escrow</a:t>
-            </a:r>
-          </a:p>
-        </p:txBody>
-      </p:sp>
-      <p:sp>
-        <p:nvSpPr>
-          <p:cNvPr id="10" name="Rounded Rectangle 9"/>
-          <p:cNvSpPr/>
-          <p:nvPr/>
-        </p:nvSpPr>
-        <p:spPr>
-          <a:xfrm>
-            <a:off x="6126480" y="1828800"/>
-            <a:ext cx="2514600" cy="4114800"/>
-          </a:xfrm>
-          <a:prstGeom prst="roundRect">
-            <a:avLst/>
-          </a:prstGeom>
-          <a:solidFill>
-            <a:srgbClr val="1E293B"/>
-          </a:solidFill>
-          <a:ln w="19050">
-            <a:solidFill>
-              <a:srgbClr val="10B981"/>
-            </a:solidFill>
-          </a:ln>
-        </p:spPr>
-        <p:style>
-          <a:lnRef idx="1">
-            <a:schemeClr val="accent1"/>
-          </a:lnRef>
-          <a:fillRef idx="3">
-            <a:schemeClr val="accent1"/>
-          </a:fillRef>
-          <a:effectRef idx="2">
-            <a:schemeClr val="accent1"/>
-          </a:effectRef>
-          <a:fontRef idx="minor">
-            <a:schemeClr val="lt1"/>
-          </a:fontRef>
-        </p:style>
-        <p:txBody>
-          <a:bodyPr rtlCol="0" anchor="ctr"/>
-          <a:lstStyle/>
-          <a:p>
-            <a:pPr algn="ctr"/>
-          </a:p>
-        </p:txBody>
-      </p:sp>
-      <p:sp>
-        <p:nvSpPr>
-          <p:cNvPr id="11" name="TextBox 10"/>
-          <p:cNvSpPr txBox="1"/>
-          <p:nvPr/>
-        </p:nvSpPr>
-        <p:spPr>
-          <a:xfrm>
-            <a:off x="6309360" y="2103120"/>
-            <a:ext cx="2148840" cy="3474720"/>
-          </a:xfrm>
-          <a:prstGeom prst="rect">
-            <a:avLst/>
-          </a:prstGeom>
-          <a:noFill/>
-        </p:spPr>
-        <p:txBody>
-          <a:bodyPr wrap="square">
-            <a:spAutoFit/>
-          </a:bodyPr>
-          <a:lstStyle/>
-          <a:p>
-            <a:pPr>
-              <a:defRPr sz="3600" b="1">
-                <a:solidFill>
-                  <a:srgbClr val="10B981"/>
-                </a:solidFill>
-              </a:defRPr>
-            </a:pPr>
-            <a:r>
-              <a:t>03</a:t>
-            </a:r>
-          </a:p>
-          <a:p>
-            <a:pPr>
-              <a:spcBef>
-                <a:spcPts val="1400"/>
-              </a:spcBef>
-              <a:defRPr sz="1600" b="1">
-                <a:solidFill>
-                  <a:srgbClr val="FFFFFF"/>
-                </a:solidFill>
-              </a:defRPr>
-            </a:pPr>
-            <a:r>
-              <a:t>Market Size &amp; Traction</a:t>
-            </a:r>
-          </a:p>
-          <a:p>
-            <a:pPr>
-              <a:spcBef>
-                <a:spcPts val="1000"/>
-              </a:spcBef>
-              <a:defRPr sz="1300">
-                <a:solidFill>
-                  <a:srgbClr val="94A3B8"/>
-                </a:solidFill>
-              </a:defRPr>
-            </a:pPr>
-            <a:r>
-              <a:t>Capturing 4,500+ active students across collegiate networks</a:t>
-            </a:r>
-          </a:p>
-        </p:txBody>
-      </p:sp>
-      <p:sp>
-        <p:nvSpPr>
-          <p:cNvPr id="12" name="Rounded Rectangle 11"/>
-          <p:cNvSpPr/>
-          <p:nvPr/>
-        </p:nvSpPr>
-        <p:spPr>
-          <a:xfrm>
-            <a:off x="8823960" y="1828800"/>
-            <a:ext cx="2514600" cy="4114800"/>
-          </a:xfrm>
-          <a:prstGeom prst="roundRect">
-            <a:avLst/>
-          </a:prstGeom>
-          <a:solidFill>
-            <a:srgbClr val="1E293B"/>
-          </a:solidFill>
-          <a:ln w="19050">
-            <a:solidFill>
-              <a:srgbClr val="10B981"/>
-            </a:solidFill>
-          </a:ln>
-        </p:spPr>
-        <p:style>
-          <a:lnRef idx="1">
-            <a:schemeClr val="accent1"/>
-          </a:lnRef>
-          <a:fillRef idx="3">
-            <a:schemeClr val="accent1"/>
-          </a:fillRef>
-          <a:effectRef idx="2">
-            <a:schemeClr val="accent1"/>
-          </a:effectRef>
-          <a:fontRef idx="minor">
-            <a:schemeClr val="lt1"/>
-          </a:fontRef>
-        </p:style>
-        <p:txBody>
-          <a:bodyPr rtlCol="0" anchor="ctr"/>
-          <a:lstStyle/>
-          <a:p>
-            <a:pPr algn="ctr"/>
-          </a:p>
-        </p:txBody>
-      </p:sp>
-      <p:sp>
-        <p:nvSpPr>
-          <p:cNvPr id="13" name="TextBox 12"/>
-          <p:cNvSpPr txBox="1"/>
-          <p:nvPr/>
-        </p:nvSpPr>
-        <p:spPr>
-          <a:xfrm>
-            <a:off x="9006840" y="2103120"/>
-            <a:ext cx="2148840" cy="3474720"/>
-          </a:xfrm>
-          <a:prstGeom prst="rect">
-            <a:avLst/>
-          </a:prstGeom>
-          <a:noFill/>
-        </p:spPr>
-        <p:txBody>
-          <a:bodyPr wrap="square">
-            <a:spAutoFit/>
-          </a:bodyPr>
-          <a:lstStyle/>
-          <a:p>
-            <a:pPr>
-              <a:defRPr sz="3600" b="1">
-                <a:solidFill>
-                  <a:srgbClr val="10B981"/>
-                </a:solidFill>
-              </a:defRPr>
-            </a:pPr>
-            <a:r>
-              <a:t>04</a:t>
-            </a:r>
-          </a:p>
-          <a:p>
-            <a:pPr>
-              <a:spcBef>
-                <a:spcPts val="1400"/>
-              </a:spcBef>
-              <a:defRPr sz="1600" b="1">
-                <a:solidFill>
-                  <a:srgbClr val="FFFFFF"/>
-                </a:solidFill>
-              </a:defRPr>
-            </a:pPr>
-            <a:r>
-              <a:t>Monetization &amp; Roadmap</a:t>
-            </a:r>
-          </a:p>
-          <a:p>
-            <a:pPr>
-              <a:spcBef>
-                <a:spcPts val="1000"/>
-              </a:spcBef>
-              <a:defRPr sz="1300">
-                <a:solidFill>
-                  <a:srgbClr val="94A3B8"/>
-                </a:solidFill>
-              </a:defRPr>
-            </a:pPr>
-            <a:r>
-              <a:t>Freemium listings, merchant deals, and regional university expansion</a:t>
+              <a:t>Image &amp; Academic Credits:</a:t>
+            </a:r>
+            <a:br/>
+            <a:r>
+              <a:t>• Visual Assets: Custom 3D renders &amp; high-res vector graphics.</a:t>
+            </a:r>
+            <a:br/>
+            <a:r>
+              <a:t>• Research Citations: APA 7th academic standards.</a:t>
+            </a:r>
+            <a:br/>
+            <a:r>
+              <a:t>• STI West Negros University • BSIT Program 2026–2027</a:t>
             </a:r>
           </a:p>
         </p:txBody>
@@ -5778,8 +4837,8 @@
 </p:sld>
 </file>
 
-<file path=ppt/slides/slide3.xml><?xml version="1.0" encoding="utf-8"?>
-<p:sld xmlns:a="http://schemas.openxmlformats.org/drawingml/2006/main" xmlns:p="http://schemas.openxmlformats.org/presentationml/2006/main" xmlns:r="http://schemas.openxmlformats.org/officeDocument/2006/relationships">
+<file path=ppt/slides/slide2.xml><?xml version="1.0" encoding="utf-8"?>
+<p:sld xmlns:p14="http://schemas.microsoft.com/office/powerpoint/2010/main" xmlns:a="http://schemas.openxmlformats.org/drawingml/2006/main" xmlns:p="http://schemas.openxmlformats.org/presentationml/2006/main" xmlns:r="http://schemas.openxmlformats.org/officeDocument/2006/relationships">
   <p:cSld>
     <p:spTree>
       <p:nvGrpSpPr>
@@ -5803,7 +4862,7 @@
             <a:avLst/>
           </a:prstGeom>
           <a:solidFill>
-            <a:srgbClr val="0F172A"/>
+            <a:srgbClr val="062820"/>
           </a:solidFill>
           <a:ln>
             <a:noFill/>
@@ -5839,8 +4898,8 @@
         </p:nvSpPr>
         <p:spPr>
           <a:xfrm>
-            <a:off x="731520" y="365760"/>
-            <a:ext cx="10058400" cy="365760"/>
+            <a:off x="731520" y="457200"/>
+            <a:ext cx="10698480" cy="1005840"/>
           </a:xfrm>
           <a:prstGeom prst="rect">
             <a:avLst/>
@@ -5848,7 +4907,7 @@
           <a:noFill/>
         </p:spPr>
         <p:txBody>
-          <a:bodyPr wrap="none">
+          <a:bodyPr wrap="square">
             <a:spAutoFit/>
           </a:bodyPr>
           <a:lstStyle/>
@@ -5856,106 +4915,72 @@
             <a:pPr>
               <a:defRPr sz="1100" b="1">
                 <a:solidFill>
-                  <a:srgbClr val="10B981"/>
+                  <a:srgbClr val="34D399"/>
                 </a:solidFill>
               </a:defRPr>
             </a:pPr>
             <a:r>
-              <a:t>KEY TAKEAWAY</a:t>
-            </a:r>
-          </a:p>
-        </p:txBody>
-      </p:sp>
-      <p:sp>
-        <p:nvSpPr>
-          <p:cNvPr id="4" name="TextBox 3"/>
-          <p:cNvSpPr txBox="1"/>
+              <a:t>MARKET FRICTION</a:t>
+            </a:r>
+          </a:p>
+          <a:p>
+            <a:pPr>
+              <a:defRPr sz="2400" b="1">
+                <a:solidFill>
+                  <a:srgbClr val="FFFFFF"/>
+                </a:solidFill>
+              </a:defRPr>
+            </a:pPr>
+            <a:r>
+              <a:t>The Problem: Unsafe Student Trading</a:t>
+            </a:r>
+          </a:p>
+        </p:txBody>
+      </p:sp>
+      <p:pic>
+        <p:nvPicPr>
+          <p:cNvPr id="4" name="!!Content_Image" descr="market_problem.png"/>
+          <p:cNvPicPr>
+            <a:picLocks noChangeAspect="1"/>
+          </p:cNvPicPr>
           <p:nvPr/>
-        </p:nvSpPr>
-        <p:spPr>
-          <a:xfrm>
-            <a:off x="731520" y="685800"/>
-            <a:ext cx="10515600" cy="731520"/>
+        </p:nvPicPr>
+        <p:blipFill>
+          <a:blip r:embed="rId2"/>
+          <a:stretch>
+            <a:fillRect/>
+          </a:stretch>
+        </p:blipFill>
+        <p:spPr>
+          <a:xfrm>
+            <a:off x="731520" y="1645920"/>
+            <a:ext cx="5029200" cy="4389120"/>
           </a:xfrm>
           <a:prstGeom prst="rect">
             <a:avLst/>
           </a:prstGeom>
-          <a:noFill/>
-        </p:spPr>
-        <p:txBody>
-          <a:bodyPr wrap="none">
-            <a:spAutoFit/>
-          </a:bodyPr>
-          <a:lstStyle/>
-          <a:p>
-            <a:pPr>
-              <a:defRPr sz="2600" b="1">
-                <a:solidFill>
-                  <a:srgbClr val="FFFFFF"/>
-                </a:solidFill>
-              </a:defRPr>
-            </a:pPr>
-            <a:r>
-              <a:t>Core Conceptual Thesis</a:t>
-            </a:r>
-          </a:p>
-        </p:txBody>
-      </p:sp>
-      <p:sp>
-        <p:nvSpPr>
-          <p:cNvPr id="5" name="TextBox 4"/>
-          <p:cNvSpPr txBox="1"/>
-          <p:nvPr/>
-        </p:nvSpPr>
-        <p:spPr>
-          <a:xfrm>
-            <a:off x="731520" y="6400800"/>
-            <a:ext cx="10728655" cy="320040"/>
-          </a:xfrm>
-          <a:prstGeom prst="rect">
-            <a:avLst/>
-          </a:prstGeom>
-          <a:noFill/>
-        </p:spPr>
-        <p:txBody>
-          <a:bodyPr wrap="none">
-            <a:spAutoFit/>
-          </a:bodyPr>
-          <a:lstStyle/>
-          <a:p>
-            <a:pPr>
-              <a:defRPr sz="900">
-                <a:solidFill>
-                  <a:srgbClr val="94A3B8"/>
-                </a:solidFill>
-              </a:defRPr>
-            </a:pPr>
-            <a:r>
-              <a:t>STI West Negros University  •  Jhon Paulo V. Gascon  •  Slide 3 of 11</a:t>
-            </a:r>
-          </a:p>
-        </p:txBody>
-      </p:sp>
-      <p:sp>
-        <p:nvSpPr>
-          <p:cNvPr id="6" name="Rounded Rectangle 5"/>
+        </p:spPr>
+      </p:pic>
+      <p:sp>
+        <p:nvSpPr>
+          <p:cNvPr id="5" name="!!Card_1"/>
           <p:cNvSpPr/>
           <p:nvPr/>
         </p:nvSpPr>
         <p:spPr>
           <a:xfrm>
-            <a:off x="731520" y="1828800"/>
-            <a:ext cx="10728655" cy="4114800"/>
+            <a:off x="6126480" y="1645920"/>
+            <a:ext cx="5303520" cy="1280160"/>
           </a:xfrm>
           <a:prstGeom prst="roundRect">
             <a:avLst/>
           </a:prstGeom>
           <a:solidFill>
-            <a:srgbClr val="1E293B"/>
+            <a:srgbClr val="0C3C30"/>
           </a:solidFill>
-          <a:ln w="25400">
+          <a:ln w="12700">
             <a:solidFill>
-              <a:srgbClr val="3B82F6"/>
+              <a:srgbClr val="34D399"/>
             </a:solidFill>
           </a:ln>
         </p:spPr>
@@ -5974,6 +4999,232 @@
           </a:fontRef>
         </p:style>
         <p:txBody>
+          <a:bodyPr rtlCol="0" anchor="ctr" wrap="square"/>
+          <a:lstStyle/>
+          <a:p>
+            <a:pPr algn="ctr">
+              <a:defRPr b="1" sz="1300">
+                <a:solidFill>
+                  <a:srgbClr val="FFFFFF"/>
+                </a:solidFill>
+              </a:defRPr>
+            </a:pPr>
+            <a:r>
+              <a:t>Facebook Group Chaos</a:t>
+            </a:r>
+          </a:p>
+          <a:p>
+            <a:pPr>
+              <a:defRPr sz="1050">
+                <a:solidFill>
+                  <a:srgbClr val="E6F8F0"/>
+                </a:solidFill>
+              </a:defRPr>
+            </a:pPr>
+            <a:r>
+              <a:t>Students buy textbooks and uniforms on unvetted social media groups rampant with scammers.</a:t>
+            </a:r>
+          </a:p>
+        </p:txBody>
+      </p:sp>
+      <p:sp>
+        <p:nvSpPr>
+          <p:cNvPr id="6" name="!!Card_2"/>
+          <p:cNvSpPr/>
+          <p:nvPr/>
+        </p:nvSpPr>
+        <p:spPr>
+          <a:xfrm>
+            <a:off x="6126480" y="3108960"/>
+            <a:ext cx="5303520" cy="1280160"/>
+          </a:xfrm>
+          <a:prstGeom prst="roundRect">
+            <a:avLst/>
+          </a:prstGeom>
+          <a:solidFill>
+            <a:srgbClr val="0C3C30"/>
+          </a:solidFill>
+          <a:ln w="12700">
+            <a:solidFill>
+              <a:srgbClr val="34D399"/>
+            </a:solidFill>
+          </a:ln>
+        </p:spPr>
+        <p:style>
+          <a:lnRef idx="1">
+            <a:schemeClr val="accent1"/>
+          </a:lnRef>
+          <a:fillRef idx="3">
+            <a:schemeClr val="accent1"/>
+          </a:fillRef>
+          <a:effectRef idx="2">
+            <a:schemeClr val="accent1"/>
+          </a:effectRef>
+          <a:fontRef idx="minor">
+            <a:schemeClr val="lt1"/>
+          </a:fontRef>
+        </p:style>
+        <p:txBody>
+          <a:bodyPr rtlCol="0" anchor="ctr" wrap="square"/>
+          <a:lstStyle/>
+          <a:p>
+            <a:pPr algn="ctr">
+              <a:defRPr b="1" sz="1300">
+                <a:solidFill>
+                  <a:srgbClr val="FFFFFF"/>
+                </a:solidFill>
+              </a:defRPr>
+            </a:pPr>
+            <a:r>
+              <a:t>Meetup Safety Concerns</a:t>
+            </a:r>
+          </a:p>
+          <a:p>
+            <a:pPr>
+              <a:defRPr sz="1050">
+                <a:solidFill>
+                  <a:srgbClr val="E6F8F0"/>
+                </a:solidFill>
+              </a:defRPr>
+            </a:pPr>
+            <a:r>
+              <a:t>Exchanging high-value tech devices with anonymous strangers outside campus gates causes physical safety hazards.</a:t>
+            </a:r>
+          </a:p>
+        </p:txBody>
+      </p:sp>
+      <p:sp>
+        <p:nvSpPr>
+          <p:cNvPr id="7" name="!!Card_3"/>
+          <p:cNvSpPr/>
+          <p:nvPr/>
+        </p:nvSpPr>
+        <p:spPr>
+          <a:xfrm>
+            <a:off x="6126480" y="4572000"/>
+            <a:ext cx="5303520" cy="1280160"/>
+          </a:xfrm>
+          <a:prstGeom prst="roundRect">
+            <a:avLst/>
+          </a:prstGeom>
+          <a:solidFill>
+            <a:srgbClr val="0C3C30"/>
+          </a:solidFill>
+          <a:ln w="12700">
+            <a:solidFill>
+              <a:srgbClr val="34D399"/>
+            </a:solidFill>
+          </a:ln>
+        </p:spPr>
+        <p:style>
+          <a:lnRef idx="1">
+            <a:schemeClr val="accent1"/>
+          </a:lnRef>
+          <a:fillRef idx="3">
+            <a:schemeClr val="accent1"/>
+          </a:fillRef>
+          <a:effectRef idx="2">
+            <a:schemeClr val="accent1"/>
+          </a:effectRef>
+          <a:fontRef idx="minor">
+            <a:schemeClr val="lt1"/>
+          </a:fontRef>
+        </p:style>
+        <p:txBody>
+          <a:bodyPr rtlCol="0" anchor="ctr" wrap="square"/>
+          <a:lstStyle/>
+          <a:p>
+            <a:pPr algn="ctr">
+              <a:defRPr b="1" sz="1300">
+                <a:solidFill>
+                  <a:srgbClr val="FFFFFF"/>
+                </a:solidFill>
+              </a:defRPr>
+            </a:pPr>
+            <a:r>
+              <a:t>Ghosting &amp; Payment Friction</a:t>
+            </a:r>
+          </a:p>
+          <a:p>
+            <a:pPr>
+              <a:defRPr sz="1050">
+                <a:solidFill>
+                  <a:srgbClr val="E6F8F0"/>
+                </a:solidFill>
+              </a:defRPr>
+            </a:pPr>
+            <a:r>
+              <a:t>High seller cancellation rates, payment delays, and lack of buyer escrow protections.</a:t>
+            </a:r>
+          </a:p>
+        </p:txBody>
+      </p:sp>
+    </p:spTree>
+  </p:cSld>
+  <p:clrMapOvr>
+    <a:masterClrMapping/>
+  </p:clrMapOvr>
+  <mc:AlternateContent xmlns:mc="http://schemas.openxmlformats.org/markup-compatibility/2006">
+    <mc:Choice xmlns:p159="http://schemas.microsoft.com/office/powerpoint/2015/09/main" Requires="p159">
+      <p:transition spd="slow" p14:dur="1500">
+        <p159:morph option="byObject"/>
+      </p:transition>
+    </mc:Choice>
+    <mc:Fallback>
+      <p:transition spd="slow">
+        <p:fade/>
+      </p:transition>
+    </mc:Fallback>
+  </mc:AlternateContent>
+</p:sld>
+</file>
+
+<file path=ppt/slides/slide3.xml><?xml version="1.0" encoding="utf-8"?>
+<p:sld xmlns:p14="http://schemas.microsoft.com/office/powerpoint/2010/main" xmlns:a="http://schemas.openxmlformats.org/drawingml/2006/main" xmlns:p="http://schemas.openxmlformats.org/presentationml/2006/main" xmlns:r="http://schemas.openxmlformats.org/officeDocument/2006/relationships">
+  <p:cSld>
+    <p:spTree>
+      <p:nvGrpSpPr>
+        <p:cNvPr id="1" name=""/>
+        <p:cNvGrpSpPr/>
+        <p:nvPr/>
+      </p:nvGrpSpPr>
+      <p:grpSpPr/>
+      <p:sp>
+        <p:nvSpPr>
+          <p:cNvPr id="2" name="Rectangle 1"/>
+          <p:cNvSpPr/>
+          <p:nvPr/>
+        </p:nvSpPr>
+        <p:spPr>
+          <a:xfrm>
+            <a:off x="0" y="0"/>
+            <a:ext cx="12191695" cy="6858000"/>
+          </a:xfrm>
+          <a:prstGeom prst="rect">
+            <a:avLst/>
+          </a:prstGeom>
+          <a:solidFill>
+            <a:srgbClr val="062820"/>
+          </a:solidFill>
+          <a:ln>
+            <a:noFill/>
+          </a:ln>
+        </p:spPr>
+        <p:style>
+          <a:lnRef idx="1">
+            <a:schemeClr val="accent1"/>
+          </a:lnRef>
+          <a:fillRef idx="3">
+            <a:schemeClr val="accent1"/>
+          </a:fillRef>
+          <a:effectRef idx="2">
+            <a:schemeClr val="accent1"/>
+          </a:effectRef>
+          <a:fontRef idx="minor">
+            <a:schemeClr val="lt1"/>
+          </a:fontRef>
+        </p:style>
+        <p:txBody>
           <a:bodyPr rtlCol="0" anchor="ctr"/>
           <a:lstStyle/>
           <a:p>
@@ -5981,16 +5232,40 @@
           </a:p>
         </p:txBody>
       </p:sp>
-      <p:sp>
-        <p:nvSpPr>
-          <p:cNvPr id="7" name="TextBox 6"/>
+      <p:pic>
+        <p:nvPicPr>
+          <p:cNvPr id="3" name="!!Hero_Image" descr="market_solution.png"/>
+          <p:cNvPicPr>
+            <a:picLocks noChangeAspect="1"/>
+          </p:cNvPicPr>
+          <p:nvPr/>
+        </p:nvPicPr>
+        <p:blipFill>
+          <a:blip r:embed="rId2"/>
+          <a:stretch>
+            <a:fillRect/>
+          </a:stretch>
+        </p:blipFill>
+        <p:spPr>
+          <a:xfrm>
+            <a:off x="731520" y="914400"/>
+            <a:ext cx="5029200" cy="5029200"/>
+          </a:xfrm>
+          <a:prstGeom prst="rect">
+            <a:avLst/>
+          </a:prstGeom>
+        </p:spPr>
+      </p:pic>
+      <p:sp>
+        <p:nvSpPr>
+          <p:cNvPr id="4" name="!!Title_Card"/>
           <p:cNvSpPr txBox="1"/>
           <p:nvPr/>
         </p:nvSpPr>
         <p:spPr>
           <a:xfrm>
-            <a:off x="1371600" y="2743200"/>
-            <a:ext cx="9448495" cy="2286000"/>
+            <a:off x="6217920" y="2011680"/>
+            <a:ext cx="5303520" cy="3200400"/>
           </a:xfrm>
           <a:prstGeom prst="rect">
             <a:avLst/>
@@ -6003,15 +5278,27 @@
           </a:bodyPr>
           <a:lstStyle/>
           <a:p>
-            <a:pPr algn="ctr">
-              <a:defRPr sz="3400" b="1">
-                <a:solidFill>
-                  <a:srgbClr val="10B981"/>
+            <a:pPr>
+              <a:defRPr sz="3200" b="1">
+                <a:solidFill>
+                  <a:srgbClr val="FFFFFF"/>
                 </a:solidFill>
               </a:defRPr>
             </a:pPr>
             <a:r>
-              <a:t>"Student commerce shouldn't happen in sketchy street corners or unverified Facebook groups."</a:t>
+              <a:t>The Solution: Verified Student Hub</a:t>
+            </a:r>
+          </a:p>
+          <a:p>
+            <a:pPr>
+              <a:defRPr sz="1600">
+                <a:solidFill>
+                  <a:srgbClr val="34D399"/>
+                </a:solidFill>
+              </a:defRPr>
+            </a:pPr>
+            <a:r>
+              <a:t>Closed-Loop Collegiate Commerce with Institutional ID Verification</a:t>
             </a:r>
           </a:p>
         </p:txBody>
@@ -6028,7 +5315,7 @@
 </file>
 
 <file path=ppt/slides/slide4.xml><?xml version="1.0" encoding="utf-8"?>
-<p:sld xmlns:a="http://schemas.openxmlformats.org/drawingml/2006/main" xmlns:p="http://schemas.openxmlformats.org/presentationml/2006/main" xmlns:r="http://schemas.openxmlformats.org/officeDocument/2006/relationships">
+<p:sld xmlns:p14="http://schemas.microsoft.com/office/powerpoint/2010/main" xmlns:a="http://schemas.openxmlformats.org/drawingml/2006/main" xmlns:p="http://schemas.openxmlformats.org/presentationml/2006/main" xmlns:r="http://schemas.openxmlformats.org/officeDocument/2006/relationships">
   <p:cSld>
     <p:spTree>
       <p:nvGrpSpPr>
@@ -6052,7 +5339,7 @@
             <a:avLst/>
           </a:prstGeom>
           <a:solidFill>
-            <a:srgbClr val="0F172A"/>
+            <a:srgbClr val="062820"/>
           </a:solidFill>
           <a:ln>
             <a:noFill/>
@@ -6088,8 +5375,8 @@
         </p:nvSpPr>
         <p:spPr>
           <a:xfrm>
-            <a:off x="731520" y="6400800"/>
-            <a:ext cx="10728655" cy="320040"/>
+            <a:off x="731520" y="457200"/>
+            <a:ext cx="10698480" cy="1005840"/>
           </a:xfrm>
           <a:prstGeom prst="rect">
             <a:avLst/>
@@ -6097,43 +5384,81 @@
           <a:noFill/>
         </p:spPr>
         <p:txBody>
-          <a:bodyPr wrap="none">
+          <a:bodyPr wrap="square">
             <a:spAutoFit/>
           </a:bodyPr>
           <a:lstStyle/>
           <a:p>
             <a:pPr>
-              <a:defRPr sz="900">
-                <a:solidFill>
-                  <a:srgbClr val="94A3B8"/>
+              <a:defRPr sz="1100" b="1">
+                <a:solidFill>
+                  <a:srgbClr val="34D399"/>
                 </a:solidFill>
               </a:defRPr>
             </a:pPr>
             <a:r>
-              <a:t>STI West Negros University  •  Jhon Paulo V. Gascon  •  Slide 4 of 11</a:t>
-            </a:r>
-          </a:p>
-        </p:txBody>
-      </p:sp>
-      <p:sp>
-        <p:nvSpPr>
-          <p:cNvPr id="4" name="Rectangle 3"/>
-          <p:cNvSpPr/>
+              <a:t>MARKET OPPORTUNITY</a:t>
+            </a:r>
+          </a:p>
+          <a:p>
+            <a:pPr>
+              <a:defRPr sz="2400" b="1">
+                <a:solidFill>
+                  <a:srgbClr val="FFFFFF"/>
+                </a:solidFill>
+              </a:defRPr>
+            </a:pPr>
+            <a:r>
+              <a:t>Total Addressable Market (TAM)</a:t>
+            </a:r>
+          </a:p>
+        </p:txBody>
+      </p:sp>
+      <p:pic>
+        <p:nvPicPr>
+          <p:cNvPr id="4" name="!!Content_Image" descr="market_market_size.png"/>
+          <p:cNvPicPr>
+            <a:picLocks noChangeAspect="1"/>
+          </p:cNvPicPr>
           <p:nvPr/>
-        </p:nvSpPr>
-        <p:spPr>
-          <a:xfrm>
-            <a:off x="731520" y="2286000"/>
-            <a:ext cx="457200" cy="2560320"/>
+        </p:nvPicPr>
+        <p:blipFill>
+          <a:blip r:embed="rId2"/>
+          <a:stretch>
+            <a:fillRect/>
+          </a:stretch>
+        </p:blipFill>
+        <p:spPr>
+          <a:xfrm>
+            <a:off x="731520" y="1645920"/>
+            <a:ext cx="5029200" cy="4389120"/>
           </a:xfrm>
           <a:prstGeom prst="rect">
             <a:avLst/>
           </a:prstGeom>
+        </p:spPr>
+      </p:pic>
+      <p:sp>
+        <p:nvSpPr>
+          <p:cNvPr id="5" name="!!Card_1"/>
+          <p:cNvSpPr/>
+          <p:nvPr/>
+        </p:nvSpPr>
+        <p:spPr>
+          <a:xfrm>
+            <a:off x="6126480" y="1645920"/>
+            <a:ext cx="5303520" cy="1280160"/>
+          </a:xfrm>
+          <a:prstGeom prst="roundRect">
+            <a:avLst/>
+          </a:prstGeom>
           <a:solidFill>
-            <a:srgbClr val="10B981"/>
+            <a:srgbClr val="0C3C30"/>
           </a:solidFill>
-          <a:ln>
-            <a:noFill/>
+          <a:ln w="12700">
+            <a:solidFill>
+              <a:srgbClr val="34D399"/>
+            </a:solidFill>
           </a:ln>
         </p:spPr>
         <p:style>
@@ -6151,79 +5476,162 @@
           </a:fontRef>
         </p:style>
         <p:txBody>
-          <a:bodyPr rtlCol="0" anchor="ctr"/>
-          <a:lstStyle/>
-          <a:p>
-            <a:pPr algn="ctr"/>
-          </a:p>
-        </p:txBody>
-      </p:sp>
-      <p:sp>
-        <p:nvSpPr>
-          <p:cNvPr id="5" name="TextBox 4"/>
-          <p:cNvSpPr txBox="1"/>
+          <a:bodyPr rtlCol="0" anchor="ctr" wrap="square"/>
+          <a:lstStyle/>
+          <a:p>
+            <a:pPr algn="ctr">
+              <a:defRPr b="1" sz="1300">
+                <a:solidFill>
+                  <a:srgbClr val="FFFFFF"/>
+                </a:solidFill>
+              </a:defRPr>
+            </a:pPr>
+            <a:r>
+              <a:t>TAM: ₱4.2B Annual Market</a:t>
+            </a:r>
+          </a:p>
+          <a:p>
+            <a:pPr>
+              <a:defRPr sz="1050">
+                <a:solidFill>
+                  <a:srgbClr val="E6F8F0"/>
+                </a:solidFill>
+              </a:defRPr>
+            </a:pPr>
+            <a:r>
+              <a:t>Total annual student spend on course materials, devices, and dorm essentials across 2,000+ PH colleges.</a:t>
+            </a:r>
+          </a:p>
+        </p:txBody>
+      </p:sp>
+      <p:sp>
+        <p:nvSpPr>
+          <p:cNvPr id="6" name="!!Card_2"/>
+          <p:cNvSpPr/>
           <p:nvPr/>
         </p:nvSpPr>
         <p:spPr>
           <a:xfrm>
-            <a:off x="1463040" y="2194560"/>
-            <a:ext cx="9601200" cy="1371600"/>
-          </a:xfrm>
-          <a:prstGeom prst="rect">
+            <a:off x="6126480" y="3108960"/>
+            <a:ext cx="5303520" cy="1280160"/>
+          </a:xfrm>
+          <a:prstGeom prst="roundRect">
             <a:avLst/>
           </a:prstGeom>
-          <a:noFill/>
-        </p:spPr>
-        <p:txBody>
-          <a:bodyPr wrap="none">
-            <a:spAutoFit/>
-          </a:bodyPr>
-          <a:lstStyle/>
+          <a:solidFill>
+            <a:srgbClr val="0C3C30"/>
+          </a:solidFill>
+          <a:ln w="12700">
+            <a:solidFill>
+              <a:srgbClr val="34D399"/>
+            </a:solidFill>
+          </a:ln>
+        </p:spPr>
+        <p:style>
+          <a:lnRef idx="1">
+            <a:schemeClr val="accent1"/>
+          </a:lnRef>
+          <a:fillRef idx="3">
+            <a:schemeClr val="accent1"/>
+          </a:fillRef>
+          <a:effectRef idx="2">
+            <a:schemeClr val="accent1"/>
+          </a:effectRef>
+          <a:fontRef idx="minor">
+            <a:schemeClr val="lt1"/>
+          </a:fontRef>
+        </p:style>
+        <p:txBody>
+          <a:bodyPr rtlCol="0" anchor="ctr" wrap="square"/>
+          <a:lstStyle/>
+          <a:p>
+            <a:pPr algn="ctr">
+              <a:defRPr b="1" sz="1300">
+                <a:solidFill>
+                  <a:srgbClr val="FFFFFF"/>
+                </a:solidFill>
+              </a:defRPr>
+            </a:pPr>
+            <a:r>
+              <a:t>SAM: ₱850M Regional Focus</a:t>
+            </a:r>
+          </a:p>
           <a:p>
             <a:pPr>
-              <a:defRPr sz="3800" b="1">
-                <a:solidFill>
-                  <a:srgbClr val="FFFFFF"/>
+              <a:defRPr sz="1050">
+                <a:solidFill>
+                  <a:srgbClr val="E6F8F0"/>
                 </a:solidFill>
               </a:defRPr>
             </a:pPr>
             <a:r>
-              <a:t>Part I: Market Friction &amp; Inefficiency</a:t>
-            </a:r>
-          </a:p>
-        </p:txBody>
-      </p:sp>
-      <p:sp>
-        <p:nvSpPr>
-          <p:cNvPr id="6" name="TextBox 5"/>
-          <p:cNvSpPr txBox="1"/>
+              <a:t>Tertiary collegiate student demographic in Western Visayas and major regional university hubs.</a:t>
+            </a:r>
+          </a:p>
+        </p:txBody>
+      </p:sp>
+      <p:sp>
+        <p:nvSpPr>
+          <p:cNvPr id="7" name="!!Card_3"/>
+          <p:cNvSpPr/>
           <p:nvPr/>
         </p:nvSpPr>
         <p:spPr>
           <a:xfrm>
-            <a:off x="1463040" y="3657600"/>
-            <a:ext cx="9601200" cy="1371600"/>
-          </a:xfrm>
-          <a:prstGeom prst="rect">
+            <a:off x="6126480" y="4572000"/>
+            <a:ext cx="5303520" cy="1280160"/>
+          </a:xfrm>
+          <a:prstGeom prst="roundRect">
             <a:avLst/>
           </a:prstGeom>
-          <a:noFill/>
-        </p:spPr>
-        <p:txBody>
-          <a:bodyPr wrap="none">
-            <a:spAutoFit/>
-          </a:bodyPr>
-          <a:lstStyle/>
+          <a:solidFill>
+            <a:srgbClr val="0C3C30"/>
+          </a:solidFill>
+          <a:ln w="12700">
+            <a:solidFill>
+              <a:srgbClr val="34D399"/>
+            </a:solidFill>
+          </a:ln>
+        </p:spPr>
+        <p:style>
+          <a:lnRef idx="1">
+            <a:schemeClr val="accent1"/>
+          </a:lnRef>
+          <a:fillRef idx="3">
+            <a:schemeClr val="accent1"/>
+          </a:fillRef>
+          <a:effectRef idx="2">
+            <a:schemeClr val="accent1"/>
+          </a:effectRef>
+          <a:fontRef idx="minor">
+            <a:schemeClr val="lt1"/>
+          </a:fontRef>
+        </p:style>
+        <p:txBody>
+          <a:bodyPr rtlCol="0" anchor="ctr" wrap="square"/>
+          <a:lstStyle/>
+          <a:p>
+            <a:pPr algn="ctr">
+              <a:defRPr b="1" sz="1300">
+                <a:solidFill>
+                  <a:srgbClr val="FFFFFF"/>
+                </a:solidFill>
+              </a:defRPr>
+            </a:pPr>
+            <a:r>
+              <a:t>SOM: ₱120M Initial Capture</a:t>
+            </a:r>
+          </a:p>
           <a:p>
             <a:pPr>
-              <a:defRPr sz="2200">
-                <a:solidFill>
-                  <a:srgbClr val="94A3B8"/>
+              <a:defRPr sz="1050">
+                <a:solidFill>
+                  <a:srgbClr val="E6F8F0"/>
                 </a:solidFill>
               </a:defRPr>
             </a:pPr>
             <a:r>
-              <a:t>Why current social media marketplaces fail college students.</a:t>
+              <a:t>Targeting 25 STI campus network branches during our 18-month rollout phase.</a:t>
             </a:r>
           </a:p>
         </p:txBody>
@@ -6233,14 +5641,23 @@
   <p:clrMapOvr>
     <a:masterClrMapping/>
   </p:clrMapOvr>
-  <p:transition spd="med">
-    <p:push dir="u"/>
-  </p:transition>
+  <mc:AlternateContent xmlns:mc="http://schemas.openxmlformats.org/markup-compatibility/2006">
+    <mc:Choice xmlns:p159="http://schemas.microsoft.com/office/powerpoint/2015/09/main" Requires="p159">
+      <p:transition spd="slow" p14:dur="1500">
+        <p159:morph option="byObject"/>
+      </p:transition>
+    </mc:Choice>
+    <mc:Fallback>
+      <p:transition spd="slow">
+        <p:fade/>
+      </p:transition>
+    </mc:Fallback>
+  </mc:AlternateContent>
 </p:sld>
 </file>
 
 <file path=ppt/slides/slide5.xml><?xml version="1.0" encoding="utf-8"?>
-<p:sld xmlns:a="http://schemas.openxmlformats.org/drawingml/2006/main" xmlns:p="http://schemas.openxmlformats.org/presentationml/2006/main" xmlns:r="http://schemas.openxmlformats.org/officeDocument/2006/relationships">
+<p:sld xmlns:p14="http://schemas.microsoft.com/office/powerpoint/2010/main" xmlns:a="http://schemas.openxmlformats.org/drawingml/2006/main" xmlns:p="http://schemas.openxmlformats.org/presentationml/2006/main" xmlns:r="http://schemas.openxmlformats.org/officeDocument/2006/relationships">
   <p:cSld>
     <p:spTree>
       <p:nvGrpSpPr>
@@ -6264,7 +5681,7 @@
             <a:avLst/>
           </a:prstGeom>
           <a:solidFill>
-            <a:srgbClr val="0F172A"/>
+            <a:srgbClr val="062820"/>
           </a:solidFill>
           <a:ln>
             <a:noFill/>
@@ -6300,8 +5717,8 @@
         </p:nvSpPr>
         <p:spPr>
           <a:xfrm>
-            <a:off x="731520" y="365760"/>
-            <a:ext cx="10058400" cy="365760"/>
+            <a:off x="731520" y="457200"/>
+            <a:ext cx="10698480" cy="1005840"/>
           </a:xfrm>
           <a:prstGeom prst="rect">
             <a:avLst/>
@@ -6309,7 +5726,7 @@
           <a:noFill/>
         </p:spPr>
         <p:txBody>
-          <a:bodyPr wrap="none">
+          <a:bodyPr wrap="square">
             <a:spAutoFit/>
           </a:bodyPr>
           <a:lstStyle/>
@@ -6317,106 +5734,48 @@
             <a:pPr>
               <a:defRPr sz="1100" b="1">
                 <a:solidFill>
-                  <a:srgbClr val="10B981"/>
+                  <a:srgbClr val="34D399"/>
                 </a:solidFill>
               </a:defRPr>
             </a:pPr>
             <a:r>
-              <a:t>EMPIRICAL EVIDENCE &amp; TRENDS</a:t>
-            </a:r>
-          </a:p>
-        </p:txBody>
-      </p:sp>
-      <p:sp>
-        <p:nvSpPr>
-          <p:cNvPr id="4" name="TextBox 3"/>
-          <p:cNvSpPr txBox="1"/>
-          <p:nvPr/>
-        </p:nvSpPr>
-        <p:spPr>
-          <a:xfrm>
-            <a:off x="731520" y="685800"/>
-            <a:ext cx="10515600" cy="731520"/>
-          </a:xfrm>
-          <a:prstGeom prst="rect">
-            <a:avLst/>
-          </a:prstGeom>
-          <a:noFill/>
-        </p:spPr>
-        <p:txBody>
-          <a:bodyPr wrap="none">
-            <a:spAutoFit/>
-          </a:bodyPr>
-          <a:lstStyle/>
+              <a:t>PRODUCT ARCHITECTURE</a:t>
+            </a:r>
+          </a:p>
           <a:p>
             <a:pPr>
-              <a:defRPr sz="2600" b="1">
+              <a:defRPr sz="2400" b="1">
                 <a:solidFill>
                   <a:srgbClr val="FFFFFF"/>
                 </a:solidFill>
               </a:defRPr>
             </a:pPr>
             <a:r>
-              <a:t>The Unaddressed Campus Commerce Gap</a:t>
-            </a:r>
-          </a:p>
-        </p:txBody>
-      </p:sp>
-      <p:sp>
-        <p:nvSpPr>
-          <p:cNvPr id="5" name="TextBox 4"/>
-          <p:cNvSpPr txBox="1"/>
-          <p:nvPr/>
-        </p:nvSpPr>
-        <p:spPr>
-          <a:xfrm>
-            <a:off x="731520" y="6400800"/>
-            <a:ext cx="10728655" cy="320040"/>
-          </a:xfrm>
-          <a:prstGeom prst="rect">
-            <a:avLst/>
-          </a:prstGeom>
-          <a:noFill/>
-        </p:spPr>
-        <p:txBody>
-          <a:bodyPr wrap="none">
-            <a:spAutoFit/>
-          </a:bodyPr>
-          <a:lstStyle/>
-          <a:p>
-            <a:pPr>
-              <a:defRPr sz="900">
-                <a:solidFill>
-                  <a:srgbClr val="94A3B8"/>
-                </a:solidFill>
-              </a:defRPr>
-            </a:pPr>
-            <a:r>
-              <a:t>STI West Negros University  •  Jhon Paulo V. Gascon  •  Slide 5 of 11</a:t>
-            </a:r>
-          </a:p>
-        </p:txBody>
-      </p:sp>
-      <p:sp>
-        <p:nvSpPr>
-          <p:cNvPr id="6" name="Rounded Rectangle 5"/>
+              <a:t>Three Core Product Features</a:t>
+            </a:r>
+          </a:p>
+        </p:txBody>
+      </p:sp>
+      <p:sp>
+        <p:nvSpPr>
+          <p:cNvPr id="4" name="!!Card_1"/>
           <p:cNvSpPr/>
           <p:nvPr/>
         </p:nvSpPr>
         <p:spPr>
           <a:xfrm>
-            <a:off x="731520" y="2011680"/>
-            <a:ext cx="3413455" cy="3840480"/>
+            <a:off x="731520" y="1645920"/>
+            <a:ext cx="3291840" cy="4114800"/>
           </a:xfrm>
           <a:prstGeom prst="roundRect">
             <a:avLst/>
           </a:prstGeom>
           <a:solidFill>
-            <a:srgbClr val="1E293B"/>
+            <a:srgbClr val="0C3C30"/>
           </a:solidFill>
           <a:ln w="19050">
             <a:solidFill>
-              <a:srgbClr val="10B981"/>
+              <a:srgbClr val="34D399"/>
             </a:solidFill>
           </a:ln>
         </p:spPr>
@@ -6435,83 +5794,54 @@
           </a:fontRef>
         </p:style>
         <p:txBody>
-          <a:bodyPr rtlCol="0" anchor="ctr"/>
-          <a:lstStyle/>
-          <a:p>
-            <a:pPr algn="ctr"/>
-          </a:p>
-        </p:txBody>
-      </p:sp>
-      <p:sp>
-        <p:nvSpPr>
-          <p:cNvPr id="7" name="TextBox 6"/>
-          <p:cNvSpPr txBox="1"/>
-          <p:nvPr/>
-        </p:nvSpPr>
-        <p:spPr>
-          <a:xfrm>
-            <a:off x="914400" y="2286000"/>
-            <a:ext cx="3047695" cy="3200400"/>
-          </a:xfrm>
-          <a:prstGeom prst="rect">
-            <a:avLst/>
-          </a:prstGeom>
-          <a:noFill/>
-        </p:spPr>
-        <p:txBody>
-          <a:bodyPr wrap="square">
-            <a:spAutoFit/>
-          </a:bodyPr>
-          <a:lstStyle/>
+          <a:bodyPr rtlCol="0" anchor="ctr" wrap="square"/>
+          <a:lstStyle/>
+          <a:p>
+            <a:pPr algn="ctr">
+              <a:defRPr b="1" sz="1500">
+                <a:solidFill>
+                  <a:srgbClr val="34D399"/>
+                </a:solidFill>
+              </a:defRPr>
+            </a:pPr>
+            <a:r>
+              <a:t>1. STI Student ID Auth</a:t>
+            </a:r>
+          </a:p>
           <a:p>
             <a:pPr>
-              <a:defRPr sz="4800" b="1">
-                <a:solidFill>
-                  <a:srgbClr val="10B981"/>
+              <a:defRPr sz="1100">
+                <a:solidFill>
+                  <a:srgbClr val="F0F0F0"/>
                 </a:solidFill>
               </a:defRPr>
             </a:pPr>
             <a:r>
-              <a:t>78%</a:t>
-            </a:r>
-          </a:p>
-          <a:p>
-            <a:pPr>
-              <a:spcBef>
-                <a:spcPts val="1600"/>
-              </a:spcBef>
-              <a:defRPr sz="1600">
-                <a:solidFill>
-                  <a:srgbClr val="FFFFFF"/>
-                </a:solidFill>
-              </a:defRPr>
-            </a:pPr>
-            <a:r>
-              <a:t>Students who buy or sell second-hand textbooks and equipment annually</a:t>
-            </a:r>
-          </a:p>
-        </p:txBody>
-      </p:sp>
-      <p:sp>
-        <p:nvSpPr>
-          <p:cNvPr id="8" name="Rounded Rectangle 7"/>
+              <a:t>Automated OCR scanning of student registration forms and .edu.ph email domain binding to ensure 100% verified peers.</a:t>
+            </a:r>
+          </a:p>
+        </p:txBody>
+      </p:sp>
+      <p:sp>
+        <p:nvSpPr>
+          <p:cNvPr id="5" name="!!Card_2"/>
           <p:cNvSpPr/>
           <p:nvPr/>
         </p:nvSpPr>
         <p:spPr>
           <a:xfrm>
-            <a:off x="4389120" y="2011680"/>
-            <a:ext cx="3413455" cy="3840480"/>
+            <a:off x="4389120" y="1645920"/>
+            <a:ext cx="3291840" cy="4114800"/>
           </a:xfrm>
           <a:prstGeom prst="roundRect">
             <a:avLst/>
           </a:prstGeom>
           <a:solidFill>
-            <a:srgbClr val="1E293B"/>
+            <a:srgbClr val="0C3C30"/>
           </a:solidFill>
           <a:ln w="19050">
             <a:solidFill>
-              <a:srgbClr val="10B981"/>
+              <a:srgbClr val="34D399"/>
             </a:solidFill>
           </a:ln>
         </p:spPr>
@@ -6530,83 +5860,54 @@
           </a:fontRef>
         </p:style>
         <p:txBody>
-          <a:bodyPr rtlCol="0" anchor="ctr"/>
-          <a:lstStyle/>
-          <a:p>
-            <a:pPr algn="ctr"/>
-          </a:p>
-        </p:txBody>
-      </p:sp>
-      <p:sp>
-        <p:nvSpPr>
-          <p:cNvPr id="9" name="TextBox 8"/>
-          <p:cNvSpPr txBox="1"/>
-          <p:nvPr/>
-        </p:nvSpPr>
-        <p:spPr>
-          <a:xfrm>
-            <a:off x="4572000" y="2286000"/>
-            <a:ext cx="3047695" cy="3200400"/>
-          </a:xfrm>
-          <a:prstGeom prst="rect">
-            <a:avLst/>
-          </a:prstGeom>
-          <a:noFill/>
-        </p:spPr>
-        <p:txBody>
-          <a:bodyPr wrap="square">
-            <a:spAutoFit/>
-          </a:bodyPr>
-          <a:lstStyle/>
+          <a:bodyPr rtlCol="0" anchor="ctr" wrap="square"/>
+          <a:lstStyle/>
+          <a:p>
+            <a:pPr algn="ctr">
+              <a:defRPr b="1" sz="1500">
+                <a:solidFill>
+                  <a:srgbClr val="34D399"/>
+                </a:solidFill>
+              </a:defRPr>
+            </a:pPr>
+            <a:r>
+              <a:t>2. In-App Escrow Holds</a:t>
+            </a:r>
+          </a:p>
           <a:p>
             <a:pPr>
-              <a:defRPr sz="4800" b="1">
-                <a:solidFill>
-                  <a:srgbClr val="10B981"/>
+              <a:defRPr sz="1100">
+                <a:solidFill>
+                  <a:srgbClr val="F0F0F0"/>
                 </a:solidFill>
               </a:defRPr>
             </a:pPr>
             <a:r>
-              <a:t>42%</a:t>
-            </a:r>
-          </a:p>
-          <a:p>
-            <a:pPr>
-              <a:spcBef>
-                <a:spcPts val="1600"/>
-              </a:spcBef>
-              <a:defRPr sz="1600">
-                <a:solidFill>
-                  <a:srgbClr val="FFFFFF"/>
-                </a:solidFill>
-              </a:defRPr>
-            </a:pPr>
-            <a:r>
-              <a:t>Students reporting ghosting, late cancellations, or payment disputes</a:t>
-            </a:r>
-          </a:p>
-        </p:txBody>
-      </p:sp>
-      <p:sp>
-        <p:nvSpPr>
-          <p:cNvPr id="10" name="Rounded Rectangle 9"/>
+              <a:t>Buyer payments via GCash/Maya are held securely until physical item verification at designated campus zones.</a:t>
+            </a:r>
+          </a:p>
+        </p:txBody>
+      </p:sp>
+      <p:sp>
+        <p:nvSpPr>
+          <p:cNvPr id="6" name="!!Card_3"/>
           <p:cNvSpPr/>
           <p:nvPr/>
         </p:nvSpPr>
         <p:spPr>
           <a:xfrm>
-            <a:off x="8046720" y="2011680"/>
-            <a:ext cx="3413455" cy="3840480"/>
+            <a:off x="8046720" y="1645920"/>
+            <a:ext cx="3291840" cy="4114800"/>
           </a:xfrm>
           <a:prstGeom prst="roundRect">
             <a:avLst/>
           </a:prstGeom>
           <a:solidFill>
-            <a:srgbClr val="1E293B"/>
+            <a:srgbClr val="0C3C30"/>
           </a:solidFill>
           <a:ln w="19050">
             <a:solidFill>
-              <a:srgbClr val="10B981"/>
+              <a:srgbClr val="34D399"/>
             </a:solidFill>
           </a:ln>
         </p:spPr>
@@ -6625,59 +5926,30 @@
           </a:fontRef>
         </p:style>
         <p:txBody>
-          <a:bodyPr rtlCol="0" anchor="ctr"/>
-          <a:lstStyle/>
-          <a:p>
-            <a:pPr algn="ctr"/>
-          </a:p>
-        </p:txBody>
-      </p:sp>
-      <p:sp>
-        <p:nvSpPr>
-          <p:cNvPr id="11" name="TextBox 10"/>
-          <p:cNvSpPr txBox="1"/>
-          <p:nvPr/>
-        </p:nvSpPr>
-        <p:spPr>
-          <a:xfrm>
-            <a:off x="8229600" y="2286000"/>
-            <a:ext cx="3047695" cy="3200400"/>
-          </a:xfrm>
-          <a:prstGeom prst="rect">
-            <a:avLst/>
-          </a:prstGeom>
-          <a:noFill/>
-        </p:spPr>
-        <p:txBody>
-          <a:bodyPr wrap="square">
-            <a:spAutoFit/>
-          </a:bodyPr>
-          <a:lstStyle/>
+          <a:bodyPr rtlCol="0" anchor="ctr" wrap="square"/>
+          <a:lstStyle/>
+          <a:p>
+            <a:pPr algn="ctr">
+              <a:defRPr b="1" sz="1500">
+                <a:solidFill>
+                  <a:srgbClr val="34D399"/>
+                </a:solidFill>
+              </a:defRPr>
+            </a:pPr>
+            <a:r>
+              <a:t>3. Course Material Matching</a:t>
+            </a:r>
+          </a:p>
           <a:p>
             <a:pPr>
-              <a:defRPr sz="4800" b="1">
-                <a:solidFill>
-                  <a:srgbClr val="10B981"/>
+              <a:defRPr sz="1100">
+                <a:solidFill>
+                  <a:srgbClr val="F0F0F0"/>
                 </a:solidFill>
               </a:defRPr>
             </a:pPr>
             <a:r>
-              <a:t>P3.2M</a:t>
-            </a:r>
-          </a:p>
-          <a:p>
-            <a:pPr>
-              <a:spcBef>
-                <a:spcPts val="1600"/>
-              </a:spcBef>
-              <a:defRPr sz="1600">
-                <a:solidFill>
-                  <a:srgbClr val="FFFFFF"/>
-                </a:solidFill>
-              </a:defRPr>
-            </a:pPr>
-            <a:r>
-              <a:t>Estimated annual peer-to-peer trading volume across regional campus hubs</a:t>
+              <a:t>Algorithm maps syllabus requirements directly to matching secondhand textbooks sold by upperclassmen.</a:t>
             </a:r>
           </a:p>
         </p:txBody>
@@ -6694,7 +5966,7 @@
 </file>
 
 <file path=ppt/slides/slide6.xml><?xml version="1.0" encoding="utf-8"?>
-<p:sld xmlns:a="http://schemas.openxmlformats.org/drawingml/2006/main" xmlns:p="http://schemas.openxmlformats.org/presentationml/2006/main" xmlns:r="http://schemas.openxmlformats.org/officeDocument/2006/relationships">
+<p:sld xmlns:p14="http://schemas.microsoft.com/office/powerpoint/2010/main" xmlns:a="http://schemas.openxmlformats.org/drawingml/2006/main" xmlns:p="http://schemas.openxmlformats.org/presentationml/2006/main" xmlns:r="http://schemas.openxmlformats.org/officeDocument/2006/relationships">
   <p:cSld>
     <p:spTree>
       <p:nvGrpSpPr>
@@ -6718,7 +5990,7 @@
             <a:avLst/>
           </a:prstGeom>
           <a:solidFill>
-            <a:srgbClr val="0F172A"/>
+            <a:srgbClr val="062820"/>
           </a:solidFill>
           <a:ln>
             <a:noFill/>
@@ -6754,8 +6026,8 @@
         </p:nvSpPr>
         <p:spPr>
           <a:xfrm>
-            <a:off x="731520" y="365760"/>
-            <a:ext cx="10058400" cy="365760"/>
+            <a:off x="731520" y="457200"/>
+            <a:ext cx="10698480" cy="1005840"/>
           </a:xfrm>
           <a:prstGeom prst="rect">
             <a:avLst/>
@@ -6763,7 +6035,7 @@
           <a:noFill/>
         </p:spPr>
         <p:txBody>
-          <a:bodyPr wrap="none">
+          <a:bodyPr wrap="square">
             <a:spAutoFit/>
           </a:bodyPr>
           <a:lstStyle/>
@@ -6771,106 +6043,72 @@
             <a:pPr>
               <a:defRPr sz="1100" b="1">
                 <a:solidFill>
-                  <a:srgbClr val="10B981"/>
+                  <a:srgbClr val="34D399"/>
                 </a:solidFill>
               </a:defRPr>
             </a:pPr>
             <a:r>
-              <a:t>STRATEGIC FRAMEWORK</a:t>
-            </a:r>
-          </a:p>
-        </p:txBody>
-      </p:sp>
-      <p:sp>
-        <p:nvSpPr>
-          <p:cNvPr id="4" name="TextBox 3"/>
-          <p:cNvSpPr txBox="1"/>
+              <a:t>REVENUE ENGINE</a:t>
+            </a:r>
+          </a:p>
+          <a:p>
+            <a:pPr>
+              <a:defRPr sz="2400" b="1">
+                <a:solidFill>
+                  <a:srgbClr val="FFFFFF"/>
+                </a:solidFill>
+              </a:defRPr>
+            </a:pPr>
+            <a:r>
+              <a:t>Monetization &amp; Unit Economics</a:t>
+            </a:r>
+          </a:p>
+        </p:txBody>
+      </p:sp>
+      <p:pic>
+        <p:nvPicPr>
+          <p:cNvPr id="4" name="!!Content_Image" descr="market_business.png"/>
+          <p:cNvPicPr>
+            <a:picLocks noChangeAspect="1"/>
+          </p:cNvPicPr>
           <p:nvPr/>
-        </p:nvSpPr>
-        <p:spPr>
-          <a:xfrm>
-            <a:off x="731520" y="685800"/>
-            <a:ext cx="10515600" cy="731520"/>
+        </p:nvPicPr>
+        <p:blipFill>
+          <a:blip r:embed="rId2"/>
+          <a:stretch>
+            <a:fillRect/>
+          </a:stretch>
+        </p:blipFill>
+        <p:spPr>
+          <a:xfrm>
+            <a:off x="731520" y="1645920"/>
+            <a:ext cx="5029200" cy="4389120"/>
           </a:xfrm>
           <a:prstGeom prst="rect">
             <a:avLst/>
           </a:prstGeom>
-          <a:noFill/>
-        </p:spPr>
-        <p:txBody>
-          <a:bodyPr wrap="none">
-            <a:spAutoFit/>
-          </a:bodyPr>
-          <a:lstStyle/>
-          <a:p>
-            <a:pPr>
-              <a:defRPr sz="2600" b="1">
-                <a:solidFill>
-                  <a:srgbClr val="FFFFFF"/>
-                </a:solidFill>
-              </a:defRPr>
-            </a:pPr>
-            <a:r>
-              <a:t>UniTrade's Three Core Safety Innovations</a:t>
-            </a:r>
-          </a:p>
-        </p:txBody>
-      </p:sp>
-      <p:sp>
-        <p:nvSpPr>
-          <p:cNvPr id="5" name="TextBox 4"/>
-          <p:cNvSpPr txBox="1"/>
-          <p:nvPr/>
-        </p:nvSpPr>
-        <p:spPr>
-          <a:xfrm>
-            <a:off x="731520" y="6400800"/>
-            <a:ext cx="10728655" cy="320040"/>
-          </a:xfrm>
-          <a:prstGeom prst="rect">
-            <a:avLst/>
-          </a:prstGeom>
-          <a:noFill/>
-        </p:spPr>
-        <p:txBody>
-          <a:bodyPr wrap="none">
-            <a:spAutoFit/>
-          </a:bodyPr>
-          <a:lstStyle/>
-          <a:p>
-            <a:pPr>
-              <a:defRPr sz="900">
-                <a:solidFill>
-                  <a:srgbClr val="94A3B8"/>
-                </a:solidFill>
-              </a:defRPr>
-            </a:pPr>
-            <a:r>
-              <a:t>STI West Negros University  •  Jhon Paulo V. Gascon  •  Slide 6 of 11</a:t>
-            </a:r>
-          </a:p>
-        </p:txBody>
-      </p:sp>
-      <p:sp>
-        <p:nvSpPr>
-          <p:cNvPr id="6" name="Rounded Rectangle 5"/>
+        </p:spPr>
+      </p:pic>
+      <p:sp>
+        <p:nvSpPr>
+          <p:cNvPr id="5" name="!!Card_1"/>
           <p:cNvSpPr/>
           <p:nvPr/>
         </p:nvSpPr>
         <p:spPr>
           <a:xfrm>
-            <a:off x="731520" y="2011680"/>
-            <a:ext cx="3413455" cy="3840480"/>
+            <a:off x="6126480" y="1645920"/>
+            <a:ext cx="5303520" cy="1280160"/>
           </a:xfrm>
           <a:prstGeom prst="roundRect">
             <a:avLst/>
           </a:prstGeom>
           <a:solidFill>
-            <a:srgbClr val="1E293B"/>
+            <a:srgbClr val="0C3C30"/>
           </a:solidFill>
-          <a:ln w="19050">
+          <a:ln w="12700">
             <a:solidFill>
-              <a:srgbClr val="3B82F6"/>
+              <a:srgbClr val="34D399"/>
             </a:solidFill>
           </a:ln>
         </p:spPr>
@@ -6889,83 +6127,54 @@
           </a:fontRef>
         </p:style>
         <p:txBody>
-          <a:bodyPr rtlCol="0" anchor="ctr"/>
-          <a:lstStyle/>
-          <a:p>
-            <a:pPr algn="ctr"/>
-          </a:p>
-        </p:txBody>
-      </p:sp>
-      <p:sp>
-        <p:nvSpPr>
-          <p:cNvPr id="7" name="TextBox 6"/>
-          <p:cNvSpPr txBox="1"/>
-          <p:nvPr/>
-        </p:nvSpPr>
-        <p:spPr>
-          <a:xfrm>
-            <a:off x="914400" y="2286000"/>
-            <a:ext cx="3047695" cy="3200400"/>
-          </a:xfrm>
-          <a:prstGeom prst="rect">
-            <a:avLst/>
-          </a:prstGeom>
-          <a:noFill/>
-        </p:spPr>
-        <p:txBody>
-          <a:bodyPr wrap="square">
-            <a:spAutoFit/>
-          </a:bodyPr>
-          <a:lstStyle/>
+          <a:bodyPr rtlCol="0" anchor="ctr" wrap="square"/>
+          <a:lstStyle/>
+          <a:p>
+            <a:pPr algn="ctr">
+              <a:defRPr b="1" sz="1300">
+                <a:solidFill>
+                  <a:srgbClr val="FFFFFF"/>
+                </a:solidFill>
+              </a:defRPr>
+            </a:pPr>
+            <a:r>
+              <a:t>3.5% Transaction Fee</a:t>
+            </a:r>
+          </a:p>
           <a:p>
             <a:pPr>
-              <a:defRPr sz="2000" b="1">
-                <a:solidFill>
-                  <a:srgbClr val="10B981"/>
+              <a:defRPr sz="1050">
+                <a:solidFill>
+                  <a:srgbClr val="E6F8F0"/>
                 </a:solidFill>
               </a:defRPr>
             </a:pPr>
             <a:r>
-              <a:t>Verified Student ID Gate</a:t>
-            </a:r>
-          </a:p>
-          <a:p>
-            <a:pPr>
-              <a:spcBef>
-                <a:spcPts val="1400"/>
-              </a:spcBef>
-              <a:defRPr sz="1400">
-                <a:solidFill>
-                  <a:srgbClr val="FFFFFF"/>
-                </a:solidFill>
-              </a:defRPr>
-            </a:pPr>
-            <a:r>
-              <a:t>Every trader is authenticated with their official institutional student email (.edu.ph).</a:t>
-            </a:r>
-          </a:p>
-        </p:txBody>
-      </p:sp>
-      <p:sp>
-        <p:nvSpPr>
-          <p:cNvPr id="8" name="Rounded Rectangle 7"/>
+              <a:t>Lightweight commission on successful transactions, split between buyer and seller.</a:t>
+            </a:r>
+          </a:p>
+        </p:txBody>
+      </p:sp>
+      <p:sp>
+        <p:nvSpPr>
+          <p:cNvPr id="6" name="!!Card_2"/>
           <p:cNvSpPr/>
           <p:nvPr/>
         </p:nvSpPr>
         <p:spPr>
           <a:xfrm>
-            <a:off x="4389120" y="2011680"/>
-            <a:ext cx="3413455" cy="3840480"/>
+            <a:off x="6126480" y="3108960"/>
+            <a:ext cx="5303520" cy="1280160"/>
           </a:xfrm>
           <a:prstGeom prst="roundRect">
             <a:avLst/>
           </a:prstGeom>
           <a:solidFill>
-            <a:srgbClr val="1E293B"/>
+            <a:srgbClr val="0C3C30"/>
           </a:solidFill>
-          <a:ln w="19050">
+          <a:ln w="12700">
             <a:solidFill>
-              <a:srgbClr val="3B82F6"/>
+              <a:srgbClr val="34D399"/>
             </a:solidFill>
           </a:ln>
         </p:spPr>
@@ -6984,83 +6193,54 @@
           </a:fontRef>
         </p:style>
         <p:txBody>
-          <a:bodyPr rtlCol="0" anchor="ctr"/>
-          <a:lstStyle/>
-          <a:p>
-            <a:pPr algn="ctr"/>
-          </a:p>
-        </p:txBody>
-      </p:sp>
-      <p:sp>
-        <p:nvSpPr>
-          <p:cNvPr id="9" name="TextBox 8"/>
-          <p:cNvSpPr txBox="1"/>
-          <p:nvPr/>
-        </p:nvSpPr>
-        <p:spPr>
-          <a:xfrm>
-            <a:off x="4572000" y="2286000"/>
-            <a:ext cx="3047695" cy="3200400"/>
-          </a:xfrm>
-          <a:prstGeom prst="rect">
-            <a:avLst/>
-          </a:prstGeom>
-          <a:noFill/>
-        </p:spPr>
-        <p:txBody>
-          <a:bodyPr wrap="square">
-            <a:spAutoFit/>
-          </a:bodyPr>
-          <a:lstStyle/>
+          <a:bodyPr rtlCol="0" anchor="ctr" wrap="square"/>
+          <a:lstStyle/>
+          <a:p>
+            <a:pPr algn="ctr">
+              <a:defRPr b="1" sz="1300">
+                <a:solidFill>
+                  <a:srgbClr val="FFFFFF"/>
+                </a:solidFill>
+              </a:defRPr>
+            </a:pPr>
+            <a:r>
+              <a:t>Campus Merchant Showcases</a:t>
+            </a:r>
+          </a:p>
           <a:p>
             <a:pPr>
-              <a:defRPr sz="2000" b="1">
-                <a:solidFill>
-                  <a:srgbClr val="10B981"/>
+              <a:defRPr sz="1050">
+                <a:solidFill>
+                  <a:srgbClr val="E6F8F0"/>
                 </a:solidFill>
               </a:defRPr>
             </a:pPr>
             <a:r>
-              <a:t>Geo-Fenced Campus Lockers</a:t>
-            </a:r>
-          </a:p>
-          <a:p>
-            <a:pPr>
-              <a:spcBef>
-                <a:spcPts val="1400"/>
-              </a:spcBef>
-              <a:defRPr sz="1400">
-                <a:solidFill>
-                  <a:srgbClr val="FFFFFF"/>
-                </a:solidFill>
-              </a:defRPr>
-            </a:pPr>
-            <a:r>
-              <a:t>Secure designated pickup stations located inside monitored university library lounges.</a:t>
-            </a:r>
-          </a:p>
-        </p:txBody>
-      </p:sp>
-      <p:sp>
-        <p:nvSpPr>
-          <p:cNvPr id="10" name="Rounded Rectangle 9"/>
+              <a:t>Local food kiosks and print shops pay ₱800/mo for featured promotion banners.</a:t>
+            </a:r>
+          </a:p>
+        </p:txBody>
+      </p:sp>
+      <p:sp>
+        <p:nvSpPr>
+          <p:cNvPr id="7" name="!!Card_3"/>
           <p:cNvSpPr/>
           <p:nvPr/>
         </p:nvSpPr>
         <p:spPr>
           <a:xfrm>
-            <a:off x="8046720" y="2011680"/>
-            <a:ext cx="3413455" cy="3840480"/>
+            <a:off x="6126480" y="4572000"/>
+            <a:ext cx="5303520" cy="1280160"/>
           </a:xfrm>
           <a:prstGeom prst="roundRect">
             <a:avLst/>
           </a:prstGeom>
           <a:solidFill>
-            <a:srgbClr val="1E293B"/>
+            <a:srgbClr val="0C3C30"/>
           </a:solidFill>
-          <a:ln w="19050">
+          <a:ln w="12700">
             <a:solidFill>
-              <a:srgbClr val="3B82F6"/>
+              <a:srgbClr val="34D399"/>
             </a:solidFill>
           </a:ln>
         </p:spPr>
@@ -7079,59 +6259,30 @@
           </a:fontRef>
         </p:style>
         <p:txBody>
-          <a:bodyPr rtlCol="0" anchor="ctr"/>
-          <a:lstStyle/>
-          <a:p>
-            <a:pPr algn="ctr"/>
-          </a:p>
-        </p:txBody>
-      </p:sp>
-      <p:sp>
-        <p:nvSpPr>
-          <p:cNvPr id="11" name="TextBox 10"/>
-          <p:cNvSpPr txBox="1"/>
-          <p:nvPr/>
-        </p:nvSpPr>
-        <p:spPr>
-          <a:xfrm>
-            <a:off x="8229600" y="2286000"/>
-            <a:ext cx="3047695" cy="3200400"/>
-          </a:xfrm>
-          <a:prstGeom prst="rect">
-            <a:avLst/>
-          </a:prstGeom>
-          <a:noFill/>
-        </p:spPr>
-        <p:txBody>
-          <a:bodyPr wrap="square">
-            <a:spAutoFit/>
-          </a:bodyPr>
-          <a:lstStyle/>
+          <a:bodyPr rtlCol="0" anchor="ctr" wrap="square"/>
+          <a:lstStyle/>
+          <a:p>
+            <a:pPr algn="ctr">
+              <a:defRPr b="1" sz="1300">
+                <a:solidFill>
+                  <a:srgbClr val="FFFFFF"/>
+                </a:solidFill>
+              </a:defRPr>
+            </a:pPr>
+            <a:r>
+              <a:t>Premium Fast-Track Listings</a:t>
+            </a:r>
+          </a:p>
           <a:p>
             <a:pPr>
-              <a:defRPr sz="2000" b="1">
-                <a:solidFill>
-                  <a:srgbClr val="10B981"/>
+              <a:defRPr sz="1050">
+                <a:solidFill>
+                  <a:srgbClr val="E6F8F0"/>
                 </a:solidFill>
               </a:defRPr>
             </a:pPr>
             <a:r>
-              <a:t>Integrated Micro-Escrow</a:t>
-            </a:r>
-          </a:p>
-          <a:p>
-            <a:pPr>
-              <a:spcBef>
-                <a:spcPts val="1400"/>
-              </a:spcBef>
-              <a:defRPr sz="1400">
-                <a:solidFill>
-                  <a:srgbClr val="FFFFFF"/>
-                </a:solidFill>
-              </a:defRPr>
-            </a:pPr>
-            <a:r>
-              <a:t>GCash and Maya escrow holds buyer payment until physical item inspection is verified.</a:t>
+              <a:t>₱25 micro-payments to highlight items at the top of course search feeds.</a:t>
             </a:r>
           </a:p>
         </p:txBody>
@@ -7148,7 +6299,7 @@
 </file>
 
 <file path=ppt/slides/slide7.xml><?xml version="1.0" encoding="utf-8"?>
-<p:sld xmlns:a="http://schemas.openxmlformats.org/drawingml/2006/main" xmlns:p="http://schemas.openxmlformats.org/presentationml/2006/main" xmlns:r="http://schemas.openxmlformats.org/officeDocument/2006/relationships">
+<p:sld xmlns:p14="http://schemas.microsoft.com/office/powerpoint/2010/main" xmlns:a="http://schemas.openxmlformats.org/drawingml/2006/main" xmlns:p="http://schemas.openxmlformats.org/presentationml/2006/main" xmlns:r="http://schemas.openxmlformats.org/officeDocument/2006/relationships">
   <p:cSld>
     <p:spTree>
       <p:nvGrpSpPr>
@@ -7172,7 +6323,7 @@
             <a:avLst/>
           </a:prstGeom>
           <a:solidFill>
-            <a:srgbClr val="0F172A"/>
+            <a:srgbClr val="062820"/>
           </a:solidFill>
           <a:ln>
             <a:noFill/>
@@ -7200,16 +6351,40 @@
           </a:p>
         </p:txBody>
       </p:sp>
-      <p:sp>
-        <p:nvSpPr>
-          <p:cNvPr id="3" name="TextBox 2"/>
+      <p:pic>
+        <p:nvPicPr>
+          <p:cNvPr id="3" name="!!Hero_Image" descr="market_traction.png"/>
+          <p:cNvPicPr>
+            <a:picLocks noChangeAspect="1"/>
+          </p:cNvPicPr>
+          <p:nvPr/>
+        </p:nvPicPr>
+        <p:blipFill>
+          <a:blip r:embed="rId2"/>
+          <a:stretch>
+            <a:fillRect/>
+          </a:stretch>
+        </p:blipFill>
+        <p:spPr>
+          <a:xfrm>
+            <a:off x="731520" y="914400"/>
+            <a:ext cx="5029200" cy="5029200"/>
+          </a:xfrm>
+          <a:prstGeom prst="rect">
+            <a:avLst/>
+          </a:prstGeom>
+        </p:spPr>
+      </p:pic>
+      <p:sp>
+        <p:nvSpPr>
+          <p:cNvPr id="4" name="!!Title_Card"/>
           <p:cNvSpPr txBox="1"/>
           <p:nvPr/>
         </p:nvSpPr>
         <p:spPr>
           <a:xfrm>
-            <a:off x="731520" y="365760"/>
-            <a:ext cx="10058400" cy="365760"/>
+            <a:off x="6217920" y="2011680"/>
+            <a:ext cx="5303520" cy="3200400"/>
           </a:xfrm>
           <a:prstGeom prst="rect">
             <a:avLst/>
@@ -7217,115 +6392,85 @@
           <a:noFill/>
         </p:spPr>
         <p:txBody>
-          <a:bodyPr wrap="none">
+          <a:bodyPr wrap="square">
             <a:spAutoFit/>
           </a:bodyPr>
           <a:lstStyle/>
           <a:p>
             <a:pPr>
-              <a:defRPr sz="1100" b="1">
-                <a:solidFill>
-                  <a:srgbClr val="10B981"/>
+              <a:defRPr sz="3200" b="1">
+                <a:solidFill>
+                  <a:srgbClr val="FFFFFF"/>
                 </a:solidFill>
               </a:defRPr>
             </a:pPr>
             <a:r>
-              <a:t>COMPARATIVE ANALYSIS</a:t>
-            </a:r>
-          </a:p>
-        </p:txBody>
-      </p:sp>
-      <p:sp>
-        <p:nvSpPr>
-          <p:cNvPr id="4" name="TextBox 3"/>
-          <p:cNvSpPr txBox="1"/>
+              <a:t>Traction &amp; Pilot Validation</a:t>
+            </a:r>
+          </a:p>
+          <a:p>
+            <a:pPr>
+              <a:defRPr sz="1600">
+                <a:solidFill>
+                  <a:srgbClr val="34D399"/>
+                </a:solidFill>
+              </a:defRPr>
+            </a:pPr>
+            <a:r>
+              <a:t>Tested with Over 1,200 Active Students at STI West Negros University</a:t>
+            </a:r>
+          </a:p>
+        </p:txBody>
+      </p:sp>
+    </p:spTree>
+  </p:cSld>
+  <p:clrMapOvr>
+    <a:masterClrMapping/>
+  </p:clrMapOvr>
+  <mc:AlternateContent xmlns:mc="http://schemas.openxmlformats.org/markup-compatibility/2006">
+    <mc:Choice xmlns:p159="http://schemas.microsoft.com/office/powerpoint/2015/09/main" Requires="p159">
+      <p:transition spd="slow" p14:dur="1500">
+        <p159:morph option="byObject"/>
+      </p:transition>
+    </mc:Choice>
+    <mc:Fallback>
+      <p:transition spd="slow">
+        <p:fade/>
+      </p:transition>
+    </mc:Fallback>
+  </mc:AlternateContent>
+</p:sld>
+</file>
+
+<file path=ppt/slides/slide8.xml><?xml version="1.0" encoding="utf-8"?>
+<p:sld xmlns:p14="http://schemas.microsoft.com/office/powerpoint/2010/main" xmlns:a="http://schemas.openxmlformats.org/drawingml/2006/main" xmlns:p="http://schemas.openxmlformats.org/presentationml/2006/main" xmlns:r="http://schemas.openxmlformats.org/officeDocument/2006/relationships">
+  <p:cSld>
+    <p:spTree>
+      <p:nvGrpSpPr>
+        <p:cNvPr id="1" name=""/>
+        <p:cNvGrpSpPr/>
+        <p:nvPr/>
+      </p:nvGrpSpPr>
+      <p:grpSpPr/>
+      <p:sp>
+        <p:nvSpPr>
+          <p:cNvPr id="2" name="Rectangle 1"/>
+          <p:cNvSpPr/>
           <p:nvPr/>
         </p:nvSpPr>
         <p:spPr>
           <a:xfrm>
-            <a:off x="731520" y="685800"/>
-            <a:ext cx="10515600" cy="731520"/>
+            <a:off x="0" y="0"/>
+            <a:ext cx="12191695" cy="6858000"/>
           </a:xfrm>
           <a:prstGeom prst="rect">
             <a:avLst/>
           </a:prstGeom>
-          <a:noFill/>
-        </p:spPr>
-        <p:txBody>
-          <a:bodyPr wrap="none">
-            <a:spAutoFit/>
-          </a:bodyPr>
-          <a:lstStyle/>
-          <a:p>
-            <a:pPr>
-              <a:defRPr sz="2600" b="1">
-                <a:solidFill>
-                  <a:srgbClr val="FFFFFF"/>
-                </a:solidFill>
-              </a:defRPr>
-            </a:pPr>
-            <a:r>
-              <a:t>Competitive Landscape Comparison</a:t>
-            </a:r>
-          </a:p>
-        </p:txBody>
-      </p:sp>
-      <p:sp>
-        <p:nvSpPr>
-          <p:cNvPr id="5" name="TextBox 4"/>
-          <p:cNvSpPr txBox="1"/>
-          <p:nvPr/>
-        </p:nvSpPr>
-        <p:spPr>
-          <a:xfrm>
-            <a:off x="731520" y="6400800"/>
-            <a:ext cx="10728655" cy="320040"/>
-          </a:xfrm>
-          <a:prstGeom prst="rect">
-            <a:avLst/>
-          </a:prstGeom>
-          <a:noFill/>
-        </p:spPr>
-        <p:txBody>
-          <a:bodyPr wrap="none">
-            <a:spAutoFit/>
-          </a:bodyPr>
-          <a:lstStyle/>
-          <a:p>
-            <a:pPr>
-              <a:defRPr sz="900">
-                <a:solidFill>
-                  <a:srgbClr val="94A3B8"/>
-                </a:solidFill>
-              </a:defRPr>
-            </a:pPr>
-            <a:r>
-              <a:t>STI West Negros University  •  Jhon Paulo V. Gascon  •  Slide 7 of 11</a:t>
-            </a:r>
-          </a:p>
-        </p:txBody>
-      </p:sp>
-      <p:sp>
-        <p:nvSpPr>
-          <p:cNvPr id="6" name="Rounded Rectangle 5"/>
-          <p:cNvSpPr/>
-          <p:nvPr/>
-        </p:nvSpPr>
-        <p:spPr>
-          <a:xfrm>
-            <a:off x="731520" y="1828800"/>
-            <a:ext cx="5212080" cy="4114800"/>
-          </a:xfrm>
-          <a:prstGeom prst="roundRect">
-            <a:avLst/>
-          </a:prstGeom>
           <a:solidFill>
-            <a:srgbClr val="1E293B"/>
+            <a:srgbClr val="062820"/>
           </a:solidFill>
-          <a:ln w="25400">
-            <a:solidFill>
-              <a:srgbClr val="10B981"/>
-            </a:solidFill>
+          <a:ln>
+            <a:noFill/>
           </a:ln>
         </p:spPr>
         <p:style>
@@ -7352,14 +6497,14 @@
       </p:sp>
       <p:sp>
         <p:nvSpPr>
-          <p:cNvPr id="7" name="TextBox 6"/>
+          <p:cNvPr id="3" name="TextBox 2"/>
           <p:cNvSpPr txBox="1"/>
           <p:nvPr/>
         </p:nvSpPr>
         <p:spPr>
           <a:xfrm>
-            <a:off x="914400" y="2011680"/>
-            <a:ext cx="4846320" cy="3657600"/>
+            <a:off x="731520" y="457200"/>
+            <a:ext cx="10698480" cy="1005840"/>
           </a:xfrm>
           <a:prstGeom prst="rect">
             <a:avLst/>
@@ -7373,98 +6518,74 @@
           <a:lstStyle/>
           <a:p>
             <a:pPr>
-              <a:defRPr sz="1800" b="1">
-                <a:solidFill>
-                  <a:srgbClr val="10B981"/>
+              <a:defRPr sz="1100" b="1">
+                <a:solidFill>
+                  <a:srgbClr val="34D399"/>
                 </a:solidFill>
               </a:defRPr>
             </a:pPr>
             <a:r>
-              <a:t>UniTrade Verified Platform</a:t>
+              <a:t>USER JOURNEY</a:t>
             </a:r>
           </a:p>
           <a:p>
             <a:pPr>
-              <a:spcBef>
-                <a:spcPts val="800"/>
-              </a:spcBef>
-              <a:defRPr sz="1300">
+              <a:defRPr sz="2400" b="1">
                 <a:solidFill>
                   <a:srgbClr val="FFFFFF"/>
                 </a:solidFill>
               </a:defRPr>
             </a:pPr>
             <a:r>
-              <a:t>•  Mandatory university email verification</a:t>
-            </a:r>
-          </a:p>
-          <a:p>
-            <a:pPr>
-              <a:spcBef>
-                <a:spcPts val="800"/>
-              </a:spcBef>
-              <a:defRPr sz="1300">
-                <a:solidFill>
-                  <a:srgbClr val="FFFFFF"/>
-                </a:solidFill>
-              </a:defRPr>
-            </a:pPr>
-            <a:r>
-              <a:t>•  Built-in buyer/seller reputation scores</a:t>
-            </a:r>
-          </a:p>
-          <a:p>
-            <a:pPr>
-              <a:spcBef>
-                <a:spcPts val="800"/>
-              </a:spcBef>
-              <a:defRPr sz="1300">
-                <a:solidFill>
-                  <a:srgbClr val="FFFFFF"/>
-                </a:solidFill>
-              </a:defRPr>
-            </a:pPr>
-            <a:r>
-              <a:t>•  Automated escrow prevents payment ghosting</a:t>
-            </a:r>
-          </a:p>
-          <a:p>
-            <a:pPr>
-              <a:spcBef>
-                <a:spcPts val="800"/>
-              </a:spcBef>
-              <a:defRPr sz="1300">
-                <a:solidFill>
-                  <a:srgbClr val="FFFFFF"/>
-                </a:solidFill>
-              </a:defRPr>
-            </a:pPr>
-            <a:r>
-              <a:t>•  Designated monitored campus exchange spots</a:t>
-            </a:r>
-          </a:p>
-        </p:txBody>
-      </p:sp>
-      <p:sp>
-        <p:nvSpPr>
-          <p:cNvPr id="8" name="Rounded Rectangle 7"/>
+              <a:t>Core Mobile App Experience</a:t>
+            </a:r>
+          </a:p>
+        </p:txBody>
+      </p:sp>
+      <p:pic>
+        <p:nvPicPr>
+          <p:cNvPr id="4" name="!!Content_Image" descr="market_product.png"/>
+          <p:cNvPicPr>
+            <a:picLocks noChangeAspect="1"/>
+          </p:cNvPicPr>
+          <p:nvPr/>
+        </p:nvPicPr>
+        <p:blipFill>
+          <a:blip r:embed="rId2"/>
+          <a:stretch>
+            <a:fillRect/>
+          </a:stretch>
+        </p:blipFill>
+        <p:spPr>
+          <a:xfrm>
+            <a:off x="731520" y="1645920"/>
+            <a:ext cx="5029200" cy="4389120"/>
+          </a:xfrm>
+          <a:prstGeom prst="rect">
+            <a:avLst/>
+          </a:prstGeom>
+        </p:spPr>
+      </p:pic>
+      <p:sp>
+        <p:nvSpPr>
+          <p:cNvPr id="5" name="!!Card_1"/>
           <p:cNvSpPr/>
           <p:nvPr/>
         </p:nvSpPr>
         <p:spPr>
           <a:xfrm>
-            <a:off x="6217920" y="1828800"/>
-            <a:ext cx="5212080" cy="4114800"/>
+            <a:off x="6126480" y="1645920"/>
+            <a:ext cx="5303520" cy="1280160"/>
           </a:xfrm>
           <a:prstGeom prst="roundRect">
             <a:avLst/>
           </a:prstGeom>
           <a:solidFill>
-            <a:srgbClr val="1E293B"/>
+            <a:srgbClr val="0C3C30"/>
           </a:solidFill>
-          <a:ln w="25400">
+          <a:ln w="12700">
             <a:solidFill>
-              <a:srgbClr val="3B82F6"/>
+              <a:srgbClr val="34D399"/>
             </a:solidFill>
           </a:ln>
         </p:spPr>
@@ -7483,104 +6604,162 @@
           </a:fontRef>
         </p:style>
         <p:txBody>
-          <a:bodyPr rtlCol="0" anchor="ctr"/>
-          <a:lstStyle/>
-          <a:p>
-            <a:pPr algn="ctr"/>
-          </a:p>
-        </p:txBody>
-      </p:sp>
-      <p:sp>
-        <p:nvSpPr>
-          <p:cNvPr id="9" name="TextBox 8"/>
-          <p:cNvSpPr txBox="1"/>
+          <a:bodyPr rtlCol="0" anchor="ctr" wrap="square"/>
+          <a:lstStyle/>
+          <a:p>
+            <a:pPr algn="ctr">
+              <a:defRPr b="1" sz="1300">
+                <a:solidFill>
+                  <a:srgbClr val="FFFFFF"/>
+                </a:solidFill>
+              </a:defRPr>
+            </a:pPr>
+            <a:r>
+              <a:t>Sub-Minute Listing Flow</a:t>
+            </a:r>
+          </a:p>
+          <a:p>
+            <a:pPr>
+              <a:defRPr sz="1050">
+                <a:solidFill>
+                  <a:srgbClr val="E6F8F0"/>
+                </a:solidFill>
+              </a:defRPr>
+            </a:pPr>
+            <a:r>
+              <a:t>Snap 3 photos, select course code, set price, and publish in under 45 seconds.</a:t>
+            </a:r>
+          </a:p>
+        </p:txBody>
+      </p:sp>
+      <p:sp>
+        <p:nvSpPr>
+          <p:cNvPr id="6" name="!!Card_2"/>
+          <p:cNvSpPr/>
           <p:nvPr/>
         </p:nvSpPr>
         <p:spPr>
           <a:xfrm>
-            <a:off x="6400800" y="2011680"/>
-            <a:ext cx="4846320" cy="3657600"/>
-          </a:xfrm>
-          <a:prstGeom prst="rect">
+            <a:off x="6126480" y="3108960"/>
+            <a:ext cx="5303520" cy="1280160"/>
+          </a:xfrm>
+          <a:prstGeom prst="roundRect">
             <a:avLst/>
           </a:prstGeom>
-          <a:noFill/>
-        </p:spPr>
-        <p:txBody>
-          <a:bodyPr wrap="square">
-            <a:spAutoFit/>
-          </a:bodyPr>
-          <a:lstStyle/>
+          <a:solidFill>
+            <a:srgbClr val="0C3C30"/>
+          </a:solidFill>
+          <a:ln w="12700">
+            <a:solidFill>
+              <a:srgbClr val="34D399"/>
+            </a:solidFill>
+          </a:ln>
+        </p:spPr>
+        <p:style>
+          <a:lnRef idx="1">
+            <a:schemeClr val="accent1"/>
+          </a:lnRef>
+          <a:fillRef idx="3">
+            <a:schemeClr val="accent1"/>
+          </a:fillRef>
+          <a:effectRef idx="2">
+            <a:schemeClr val="accent1"/>
+          </a:effectRef>
+          <a:fontRef idx="minor">
+            <a:schemeClr val="lt1"/>
+          </a:fontRef>
+        </p:style>
+        <p:txBody>
+          <a:bodyPr rtlCol="0" anchor="ctr" wrap="square"/>
+          <a:lstStyle/>
+          <a:p>
+            <a:pPr algn="ctr">
+              <a:defRPr b="1" sz="1300">
+                <a:solidFill>
+                  <a:srgbClr val="FFFFFF"/>
+                </a:solidFill>
+              </a:defRPr>
+            </a:pPr>
+            <a:r>
+              <a:t>Real-Time Campus Chat</a:t>
+            </a:r>
+          </a:p>
           <a:p>
             <a:pPr>
-              <a:defRPr sz="1800" b="1">
-                <a:solidFill>
-                  <a:srgbClr val="3B82F6"/>
+              <a:defRPr sz="1050">
+                <a:solidFill>
+                  <a:srgbClr val="E6F8F0"/>
                 </a:solidFill>
               </a:defRPr>
             </a:pPr>
             <a:r>
-              <a:t>Unregulated Social Groups</a:t>
+              <a:t>End-to-end encrypted messaging with automated meetup scheduling at campus landmarks.</a:t>
+            </a:r>
+          </a:p>
+        </p:txBody>
+      </p:sp>
+      <p:sp>
+        <p:nvSpPr>
+          <p:cNvPr id="7" name="!!Card_3"/>
+          <p:cNvSpPr/>
+          <p:nvPr/>
+        </p:nvSpPr>
+        <p:spPr>
+          <a:xfrm>
+            <a:off x="6126480" y="4572000"/>
+            <a:ext cx="5303520" cy="1280160"/>
+          </a:xfrm>
+          <a:prstGeom prst="roundRect">
+            <a:avLst/>
+          </a:prstGeom>
+          <a:solidFill>
+            <a:srgbClr val="0C3C30"/>
+          </a:solidFill>
+          <a:ln w="12700">
+            <a:solidFill>
+              <a:srgbClr val="34D399"/>
+            </a:solidFill>
+          </a:ln>
+        </p:spPr>
+        <p:style>
+          <a:lnRef idx="1">
+            <a:schemeClr val="accent1"/>
+          </a:lnRef>
+          <a:fillRef idx="3">
+            <a:schemeClr val="accent1"/>
+          </a:fillRef>
+          <a:effectRef idx="2">
+            <a:schemeClr val="accent1"/>
+          </a:effectRef>
+          <a:fontRef idx="minor">
+            <a:schemeClr val="lt1"/>
+          </a:fontRef>
+        </p:style>
+        <p:txBody>
+          <a:bodyPr rtlCol="0" anchor="ctr" wrap="square"/>
+          <a:lstStyle/>
+          <a:p>
+            <a:pPr algn="ctr">
+              <a:defRPr b="1" sz="1300">
+                <a:solidFill>
+                  <a:srgbClr val="FFFFFF"/>
+                </a:solidFill>
+              </a:defRPr>
+            </a:pPr>
+            <a:r>
+              <a:t>Reputation &amp; Review Badges</a:t>
             </a:r>
           </a:p>
           <a:p>
             <a:pPr>
-              <a:spcBef>
-                <a:spcPts val="800"/>
-              </a:spcBef>
-              <a:defRPr sz="1300">
-                <a:solidFill>
-                  <a:srgbClr val="FFFFFF"/>
+              <a:defRPr sz="1050">
+                <a:solidFill>
+                  <a:srgbClr val="E6F8F0"/>
                 </a:solidFill>
               </a:defRPr>
             </a:pPr>
             <a:r>
-              <a:t>•  Anonymous profiles and burner accounts</a:t>
-            </a:r>
-          </a:p>
-          <a:p>
-            <a:pPr>
-              <a:spcBef>
-                <a:spcPts val="800"/>
-              </a:spcBef>
-              <a:defRPr sz="1300">
-                <a:solidFill>
-                  <a:srgbClr val="FFFFFF"/>
-                </a:solidFill>
-              </a:defRPr>
-            </a:pPr>
-            <a:r>
-              <a:t>•  Zero transaction history or accountability</a:t>
-            </a:r>
-          </a:p>
-          <a:p>
-            <a:pPr>
-              <a:spcBef>
-                <a:spcPts val="800"/>
-              </a:spcBef>
-              <a:defRPr sz="1300">
-                <a:solidFill>
-                  <a:srgbClr val="FFFFFF"/>
-                </a:solidFill>
-              </a:defRPr>
-            </a:pPr>
-            <a:r>
-              <a:t>•  Pre-payment fraud and fake delivery slips</a:t>
-            </a:r>
-          </a:p>
-          <a:p>
-            <a:pPr>
-              <a:spcBef>
-                <a:spcPts val="800"/>
-              </a:spcBef>
-              <a:defRPr sz="1300">
-                <a:solidFill>
-                  <a:srgbClr val="FFFFFF"/>
-                </a:solidFill>
-              </a:defRPr>
-            </a:pPr>
-            <a:r>
-              <a:t>•  Unsafe street meetups after class hours</a:t>
+              <a:t>Verified peer review scores reward punctual sellers with high trust rankings.</a:t>
             </a:r>
           </a:p>
         </p:txBody>
@@ -7596,8 +6775,8 @@
 </p:sld>
 </file>
 
-<file path=ppt/slides/slide8.xml><?xml version="1.0" encoding="utf-8"?>
-<p:sld xmlns:a="http://schemas.openxmlformats.org/drawingml/2006/main" xmlns:p="http://schemas.openxmlformats.org/presentationml/2006/main" xmlns:r="http://schemas.openxmlformats.org/officeDocument/2006/relationships">
+<file path=ppt/slides/slide9.xml><?xml version="1.0" encoding="utf-8"?>
+<p:sld xmlns:p14="http://schemas.microsoft.com/office/powerpoint/2010/main" xmlns:a="http://schemas.openxmlformats.org/drawingml/2006/main" xmlns:p="http://schemas.openxmlformats.org/presentationml/2006/main" xmlns:r="http://schemas.openxmlformats.org/officeDocument/2006/relationships">
   <p:cSld>
     <p:spTree>
       <p:nvGrpSpPr>
@@ -7621,7 +6800,7 @@
             <a:avLst/>
           </a:prstGeom>
           <a:solidFill>
-            <a:srgbClr val="0F172A"/>
+            <a:srgbClr val="062820"/>
           </a:solidFill>
           <a:ln>
             <a:noFill/>
@@ -7657,8 +6836,8 @@
         </p:nvSpPr>
         <p:spPr>
           <a:xfrm>
-            <a:off x="731520" y="6400800"/>
-            <a:ext cx="10728655" cy="320040"/>
+            <a:off x="731520" y="457200"/>
+            <a:ext cx="10698480" cy="1005840"/>
           </a:xfrm>
           <a:prstGeom prst="rect">
             <a:avLst/>
@@ -7666,43 +6845,57 @@
           <a:noFill/>
         </p:spPr>
         <p:txBody>
-          <a:bodyPr wrap="none">
+          <a:bodyPr wrap="square">
             <a:spAutoFit/>
           </a:bodyPr>
           <a:lstStyle/>
           <a:p>
             <a:pPr>
-              <a:defRPr sz="900">
-                <a:solidFill>
-                  <a:srgbClr val="94A3B8"/>
+              <a:defRPr sz="1100" b="1">
+                <a:solidFill>
+                  <a:srgbClr val="34D399"/>
                 </a:solidFill>
               </a:defRPr>
             </a:pPr>
             <a:r>
-              <a:t>STI West Negros University  •  Jhon Paulo V. Gascon  •  Slide 8 of 11</a:t>
-            </a:r>
-          </a:p>
-        </p:txBody>
-      </p:sp>
-      <p:sp>
-        <p:nvSpPr>
-          <p:cNvPr id="4" name="Rectangle 3"/>
+              <a:t>STRATEGIC MILESTONES</a:t>
+            </a:r>
+          </a:p>
+          <a:p>
+            <a:pPr>
+              <a:defRPr sz="2400" b="1">
+                <a:solidFill>
+                  <a:srgbClr val="FFFFFF"/>
+                </a:solidFill>
+              </a:defRPr>
+            </a:pPr>
+            <a:r>
+              <a:t>12-Month Expansion Roadmap</a:t>
+            </a:r>
+          </a:p>
+        </p:txBody>
+      </p:sp>
+      <p:sp>
+        <p:nvSpPr>
+          <p:cNvPr id="4" name="!!Card_1"/>
           <p:cNvSpPr/>
           <p:nvPr/>
         </p:nvSpPr>
         <p:spPr>
           <a:xfrm>
-            <a:off x="731520" y="2286000"/>
-            <a:ext cx="457200" cy="2560320"/>
-          </a:xfrm>
-          <a:prstGeom prst="rect">
+            <a:off x="731520" y="1645920"/>
+            <a:ext cx="3291840" cy="4114800"/>
+          </a:xfrm>
+          <a:prstGeom prst="roundRect">
             <a:avLst/>
           </a:prstGeom>
           <a:solidFill>
-            <a:srgbClr val="10B981"/>
+            <a:srgbClr val="0C3C30"/>
           </a:solidFill>
-          <a:ln>
-            <a:noFill/>
+          <a:ln w="19050">
+            <a:solidFill>
+              <a:srgbClr val="34D399"/>
+            </a:solidFill>
           </a:ln>
         </p:spPr>
         <p:style>
@@ -7720,79 +6913,162 @@
           </a:fontRef>
         </p:style>
         <p:txBody>
-          <a:bodyPr rtlCol="0" anchor="ctr"/>
-          <a:lstStyle/>
-          <a:p>
-            <a:pPr algn="ctr"/>
-          </a:p>
-        </p:txBody>
-      </p:sp>
-      <p:sp>
-        <p:nvSpPr>
-          <p:cNvPr id="5" name="TextBox 4"/>
-          <p:cNvSpPr txBox="1"/>
+          <a:bodyPr rtlCol="0" anchor="ctr" wrap="square"/>
+          <a:lstStyle/>
+          <a:p>
+            <a:pPr algn="ctr">
+              <a:defRPr b="1" sz="1500">
+                <a:solidFill>
+                  <a:srgbClr val="34D399"/>
+                </a:solidFill>
+              </a:defRPr>
+            </a:pPr>
+            <a:r>
+              <a:t>Q1: Negros Expansion</a:t>
+            </a:r>
+          </a:p>
+          <a:p>
+            <a:pPr>
+              <a:defRPr sz="1100">
+                <a:solidFill>
+                  <a:srgbClr val="F0F0F0"/>
+                </a:solidFill>
+              </a:defRPr>
+            </a:pPr>
+            <a:r>
+              <a:t>Expand to Bacolod City colleges (USLS, UNO-R, Riverside) reaching 15,000 active monthly transacting users.</a:t>
+            </a:r>
+          </a:p>
+        </p:txBody>
+      </p:sp>
+      <p:sp>
+        <p:nvSpPr>
+          <p:cNvPr id="5" name="!!Card_2"/>
+          <p:cNvSpPr/>
           <p:nvPr/>
         </p:nvSpPr>
         <p:spPr>
           <a:xfrm>
-            <a:off x="1463040" y="2194560"/>
-            <a:ext cx="9601200" cy="1371600"/>
-          </a:xfrm>
-          <a:prstGeom prst="rect">
+            <a:off x="4389120" y="1645920"/>
+            <a:ext cx="3291840" cy="4114800"/>
+          </a:xfrm>
+          <a:prstGeom prst="roundRect">
             <a:avLst/>
           </a:prstGeom>
-          <a:noFill/>
-        </p:spPr>
-        <p:txBody>
-          <a:bodyPr wrap="none">
-            <a:spAutoFit/>
-          </a:bodyPr>
-          <a:lstStyle/>
+          <a:solidFill>
+            <a:srgbClr val="0C3C30"/>
+          </a:solidFill>
+          <a:ln w="19050">
+            <a:solidFill>
+              <a:srgbClr val="34D399"/>
+            </a:solidFill>
+          </a:ln>
+        </p:spPr>
+        <p:style>
+          <a:lnRef idx="1">
+            <a:schemeClr val="accent1"/>
+          </a:lnRef>
+          <a:fillRef idx="3">
+            <a:schemeClr val="accent1"/>
+          </a:fillRef>
+          <a:effectRef idx="2">
+            <a:schemeClr val="accent1"/>
+          </a:effectRef>
+          <a:fontRef idx="minor">
+            <a:schemeClr val="lt1"/>
+          </a:fontRef>
+        </p:style>
+        <p:txBody>
+          <a:bodyPr rtlCol="0" anchor="ctr" wrap="square"/>
+          <a:lstStyle/>
+          <a:p>
+            <a:pPr algn="ctr">
+              <a:defRPr b="1" sz="1500">
+                <a:solidFill>
+                  <a:srgbClr val="34D399"/>
+                </a:solidFill>
+              </a:defRPr>
+            </a:pPr>
+            <a:r>
+              <a:t>Q2: Western Visayas Hub</a:t>
+            </a:r>
+          </a:p>
           <a:p>
             <a:pPr>
-              <a:defRPr sz="3800" b="1">
-                <a:solidFill>
-                  <a:srgbClr val="FFFFFF"/>
+              <a:defRPr sz="1100">
+                <a:solidFill>
+                  <a:srgbClr val="F0F0F0"/>
                 </a:solidFill>
               </a:defRPr>
             </a:pPr>
             <a:r>
-              <a:t>Part II: Financial Feasibility &amp; Growth</a:t>
-            </a:r>
-          </a:p>
-        </p:txBody>
-      </p:sp>
-      <p:sp>
-        <p:nvSpPr>
-          <p:cNvPr id="6" name="TextBox 5"/>
-          <p:cNvSpPr txBox="1"/>
+              <a:t>Rollout to Iloilo City campuses, establishing regional delivery logistics for inter-campus course gear.</a:t>
+            </a:r>
+          </a:p>
+        </p:txBody>
+      </p:sp>
+      <p:sp>
+        <p:nvSpPr>
+          <p:cNvPr id="6" name="!!Card_3"/>
+          <p:cNvSpPr/>
           <p:nvPr/>
         </p:nvSpPr>
         <p:spPr>
           <a:xfrm>
-            <a:off x="1463040" y="3657600"/>
-            <a:ext cx="9601200" cy="1371600"/>
-          </a:xfrm>
-          <a:prstGeom prst="rect">
+            <a:off x="8046720" y="1645920"/>
+            <a:ext cx="3291840" cy="4114800"/>
+          </a:xfrm>
+          <a:prstGeom prst="roundRect">
             <a:avLst/>
           </a:prstGeom>
-          <a:noFill/>
-        </p:spPr>
-        <p:txBody>
-          <a:bodyPr wrap="none">
-            <a:spAutoFit/>
-          </a:bodyPr>
-          <a:lstStyle/>
+          <a:solidFill>
+            <a:srgbClr val="0C3C30"/>
+          </a:solidFill>
+          <a:ln w="19050">
+            <a:solidFill>
+              <a:srgbClr val="34D399"/>
+            </a:solidFill>
+          </a:ln>
+        </p:spPr>
+        <p:style>
+          <a:lnRef idx="1">
+            <a:schemeClr val="accent1"/>
+          </a:lnRef>
+          <a:fillRef idx="3">
+            <a:schemeClr val="accent1"/>
+          </a:fillRef>
+          <a:effectRef idx="2">
+            <a:schemeClr val="accent1"/>
+          </a:effectRef>
+          <a:fontRef idx="minor">
+            <a:schemeClr val="lt1"/>
+          </a:fontRef>
+        </p:style>
+        <p:txBody>
+          <a:bodyPr rtlCol="0" anchor="ctr" wrap="square"/>
+          <a:lstStyle/>
+          <a:p>
+            <a:pPr algn="ctr">
+              <a:defRPr b="1" sz="1500">
+                <a:solidFill>
+                  <a:srgbClr val="34D399"/>
+                </a:solidFill>
+              </a:defRPr>
+            </a:pPr>
+            <a:r>
+              <a:t>Q3: Nationwide STI Network</a:t>
+            </a:r>
+          </a:p>
           <a:p>
             <a:pPr>
-              <a:defRPr sz="2200">
-                <a:solidFill>
-                  <a:srgbClr val="94A3B8"/>
+              <a:defRPr sz="1100">
+                <a:solidFill>
+                  <a:srgbClr val="F0F0F0"/>
                 </a:solidFill>
               </a:defRPr>
             </a:pPr>
             <a:r>
-              <a:t>Scalable revenue streams and regional rollout strategy.</a:t>
+              <a:t>Full API deployment across all 60+ STI academic campuses in Luzon, Visayas, and Mindanao.</a:t>
             </a:r>
           </a:p>
         </p:txBody>
@@ -7802,618 +7078,18 @@
   <p:clrMapOvr>
     <a:masterClrMapping/>
   </p:clrMapOvr>
-  <p:transition spd="med">
-    <p:push dir="u"/>
-  </p:transition>
-</p:sld>
-</file>
-
-<file path=ppt/slides/slide9.xml><?xml version="1.0" encoding="utf-8"?>
-<p:sld xmlns:a="http://schemas.openxmlformats.org/drawingml/2006/main" xmlns:p="http://schemas.openxmlformats.org/presentationml/2006/main" xmlns:r="http://schemas.openxmlformats.org/officeDocument/2006/relationships">
-  <p:cSld>
-    <p:spTree>
-      <p:nvGrpSpPr>
-        <p:cNvPr id="1" name=""/>
-        <p:cNvGrpSpPr/>
-        <p:nvPr/>
-      </p:nvGrpSpPr>
-      <p:grpSpPr/>
-      <p:sp>
-        <p:nvSpPr>
-          <p:cNvPr id="2" name="Rectangle 1"/>
-          <p:cNvSpPr/>
-          <p:nvPr/>
-        </p:nvSpPr>
-        <p:spPr>
-          <a:xfrm>
-            <a:off x="0" y="0"/>
-            <a:ext cx="12191695" cy="6858000"/>
-          </a:xfrm>
-          <a:prstGeom prst="rect">
-            <a:avLst/>
-          </a:prstGeom>
-          <a:solidFill>
-            <a:srgbClr val="0F172A"/>
-          </a:solidFill>
-          <a:ln>
-            <a:noFill/>
-          </a:ln>
-        </p:spPr>
-        <p:style>
-          <a:lnRef idx="1">
-            <a:schemeClr val="accent1"/>
-          </a:lnRef>
-          <a:fillRef idx="3">
-            <a:schemeClr val="accent1"/>
-          </a:fillRef>
-          <a:effectRef idx="2">
-            <a:schemeClr val="accent1"/>
-          </a:effectRef>
-          <a:fontRef idx="minor">
-            <a:schemeClr val="lt1"/>
-          </a:fontRef>
-        </p:style>
-        <p:txBody>
-          <a:bodyPr rtlCol="0" anchor="ctr"/>
-          <a:lstStyle/>
-          <a:p>
-            <a:pPr algn="ctr"/>
-          </a:p>
-        </p:txBody>
-      </p:sp>
-      <p:sp>
-        <p:nvSpPr>
-          <p:cNvPr id="3" name="TextBox 2"/>
-          <p:cNvSpPr txBox="1"/>
-          <p:nvPr/>
-        </p:nvSpPr>
-        <p:spPr>
-          <a:xfrm>
-            <a:off x="731520" y="365760"/>
-            <a:ext cx="10058400" cy="365760"/>
-          </a:xfrm>
-          <a:prstGeom prst="rect">
-            <a:avLst/>
-          </a:prstGeom>
-          <a:noFill/>
-        </p:spPr>
-        <p:txBody>
-          <a:bodyPr wrap="none">
-            <a:spAutoFit/>
-          </a:bodyPr>
-          <a:lstStyle/>
-          <a:p>
-            <a:pPr>
-              <a:defRPr sz="1100" b="1">
-                <a:solidFill>
-                  <a:srgbClr val="10B981"/>
-                </a:solidFill>
-              </a:defRPr>
-            </a:pPr>
-            <a:r>
-              <a:t>EXECUTION METHODOLOGY</a:t>
-            </a:r>
-          </a:p>
-        </p:txBody>
-      </p:sp>
-      <p:sp>
-        <p:nvSpPr>
-          <p:cNvPr id="4" name="TextBox 3"/>
-          <p:cNvSpPr txBox="1"/>
-          <p:nvPr/>
-        </p:nvSpPr>
-        <p:spPr>
-          <a:xfrm>
-            <a:off x="731520" y="685800"/>
-            <a:ext cx="10515600" cy="731520"/>
-          </a:xfrm>
-          <a:prstGeom prst="rect">
-            <a:avLst/>
-          </a:prstGeom>
-          <a:noFill/>
-        </p:spPr>
-        <p:txBody>
-          <a:bodyPr wrap="none">
-            <a:spAutoFit/>
-          </a:bodyPr>
-          <a:lstStyle/>
-          <a:p>
-            <a:pPr>
-              <a:defRPr sz="2600" b="1">
-                <a:solidFill>
-                  <a:srgbClr val="FFFFFF"/>
-                </a:solidFill>
-              </a:defRPr>
-            </a:pPr>
-            <a:r>
-              <a:t>User Transaction Flow in UniTrade</a:t>
-            </a:r>
-          </a:p>
-        </p:txBody>
-      </p:sp>
-      <p:sp>
-        <p:nvSpPr>
-          <p:cNvPr id="5" name="TextBox 4"/>
-          <p:cNvSpPr txBox="1"/>
-          <p:nvPr/>
-        </p:nvSpPr>
-        <p:spPr>
-          <a:xfrm>
-            <a:off x="731520" y="6400800"/>
-            <a:ext cx="10728655" cy="320040"/>
-          </a:xfrm>
-          <a:prstGeom prst="rect">
-            <a:avLst/>
-          </a:prstGeom>
-          <a:noFill/>
-        </p:spPr>
-        <p:txBody>
-          <a:bodyPr wrap="none">
-            <a:spAutoFit/>
-          </a:bodyPr>
-          <a:lstStyle/>
-          <a:p>
-            <a:pPr>
-              <a:defRPr sz="900">
-                <a:solidFill>
-                  <a:srgbClr val="94A3B8"/>
-                </a:solidFill>
-              </a:defRPr>
-            </a:pPr>
-            <a:r>
-              <a:t>STI West Negros University  •  Jhon Paulo V. Gascon  •  Slide 9 of 11</a:t>
-            </a:r>
-          </a:p>
-        </p:txBody>
-      </p:sp>
-      <p:sp>
-        <p:nvSpPr>
-          <p:cNvPr id="6" name="Rounded Rectangle 5"/>
-          <p:cNvSpPr/>
-          <p:nvPr/>
-        </p:nvSpPr>
-        <p:spPr>
-          <a:xfrm>
-            <a:off x="731520" y="2011680"/>
-            <a:ext cx="2514600" cy="3840480"/>
-          </a:xfrm>
-          <a:prstGeom prst="roundRect">
-            <a:avLst/>
-          </a:prstGeom>
-          <a:solidFill>
-            <a:srgbClr val="1E293B"/>
-          </a:solidFill>
-          <a:ln w="19050">
-            <a:solidFill>
-              <a:srgbClr val="10B981"/>
-            </a:solidFill>
-          </a:ln>
-        </p:spPr>
-        <p:style>
-          <a:lnRef idx="1">
-            <a:schemeClr val="accent1"/>
-          </a:lnRef>
-          <a:fillRef idx="3">
-            <a:schemeClr val="accent1"/>
-          </a:fillRef>
-          <a:effectRef idx="2">
-            <a:schemeClr val="accent1"/>
-          </a:effectRef>
-          <a:fontRef idx="minor">
-            <a:schemeClr val="lt1"/>
-          </a:fontRef>
-        </p:style>
-        <p:txBody>
-          <a:bodyPr rtlCol="0" anchor="ctr"/>
-          <a:lstStyle/>
-          <a:p>
-            <a:pPr algn="ctr"/>
-          </a:p>
-        </p:txBody>
-      </p:sp>
-      <p:sp>
-        <p:nvSpPr>
-          <p:cNvPr id="7" name="TextBox 6"/>
-          <p:cNvSpPr txBox="1"/>
-          <p:nvPr/>
-        </p:nvSpPr>
-        <p:spPr>
-          <a:xfrm>
-            <a:off x="868680" y="2194560"/>
-            <a:ext cx="2240280" cy="3474720"/>
-          </a:xfrm>
-          <a:prstGeom prst="rect">
-            <a:avLst/>
-          </a:prstGeom>
-          <a:noFill/>
-        </p:spPr>
-        <p:txBody>
-          <a:bodyPr wrap="square">
-            <a:spAutoFit/>
-          </a:bodyPr>
-          <a:lstStyle/>
-          <a:p>
-            <a:pPr>
-              <a:defRPr sz="1300" b="1">
-                <a:solidFill>
-                  <a:srgbClr val="3B82F6"/>
-                </a:solidFill>
-              </a:defRPr>
-            </a:pPr>
-            <a:r>
-              <a:t>Step 1</a:t>
-            </a:r>
-          </a:p>
-          <a:p>
-            <a:pPr>
-              <a:spcBef>
-                <a:spcPts val="600"/>
-              </a:spcBef>
-              <a:defRPr sz="1600" b="1">
-                <a:solidFill>
-                  <a:srgbClr val="FFFFFF"/>
-                </a:solidFill>
-              </a:defRPr>
-            </a:pPr>
-            <a:r>
-              <a:t>List in 30 Seconds</a:t>
-            </a:r>
-          </a:p>
-          <a:p>
-            <a:pPr>
-              <a:spcBef>
-                <a:spcPts val="800"/>
-              </a:spcBef>
-              <a:defRPr sz="1200">
-                <a:solidFill>
-                  <a:srgbClr val="94A3B8"/>
-                </a:solidFill>
-              </a:defRPr>
-            </a:pPr>
-            <a:r>
-              <a:t>Snap photo, set student price, tag target subject course code.</a:t>
-            </a:r>
-          </a:p>
-        </p:txBody>
-      </p:sp>
-      <p:sp>
-        <p:nvSpPr>
-          <p:cNvPr id="8" name="Rounded Rectangle 7"/>
-          <p:cNvSpPr/>
-          <p:nvPr/>
-        </p:nvSpPr>
-        <p:spPr>
-          <a:xfrm>
-            <a:off x="3429000" y="2011680"/>
-            <a:ext cx="2514600" cy="3840480"/>
-          </a:xfrm>
-          <a:prstGeom prst="roundRect">
-            <a:avLst/>
-          </a:prstGeom>
-          <a:solidFill>
-            <a:srgbClr val="1E293B"/>
-          </a:solidFill>
-          <a:ln w="19050">
-            <a:solidFill>
-              <a:srgbClr val="10B981"/>
-            </a:solidFill>
-          </a:ln>
-        </p:spPr>
-        <p:style>
-          <a:lnRef idx="1">
-            <a:schemeClr val="accent1"/>
-          </a:lnRef>
-          <a:fillRef idx="3">
-            <a:schemeClr val="accent1"/>
-          </a:fillRef>
-          <a:effectRef idx="2">
-            <a:schemeClr val="accent1"/>
-          </a:effectRef>
-          <a:fontRef idx="minor">
-            <a:schemeClr val="lt1"/>
-          </a:fontRef>
-        </p:style>
-        <p:txBody>
-          <a:bodyPr rtlCol="0" anchor="ctr"/>
-          <a:lstStyle/>
-          <a:p>
-            <a:pPr algn="ctr"/>
-          </a:p>
-        </p:txBody>
-      </p:sp>
-      <p:sp>
-        <p:nvSpPr>
-          <p:cNvPr id="9" name="TextBox 8"/>
-          <p:cNvSpPr txBox="1"/>
-          <p:nvPr/>
-        </p:nvSpPr>
-        <p:spPr>
-          <a:xfrm>
-            <a:off x="3566160" y="2194560"/>
-            <a:ext cx="2240280" cy="3474720"/>
-          </a:xfrm>
-          <a:prstGeom prst="rect">
-            <a:avLst/>
-          </a:prstGeom>
-          <a:noFill/>
-        </p:spPr>
-        <p:txBody>
-          <a:bodyPr wrap="square">
-            <a:spAutoFit/>
-          </a:bodyPr>
-          <a:lstStyle/>
-          <a:p>
-            <a:pPr>
-              <a:defRPr sz="1300" b="1">
-                <a:solidFill>
-                  <a:srgbClr val="3B82F6"/>
-                </a:solidFill>
-              </a:defRPr>
-            </a:pPr>
-            <a:r>
-              <a:t>Step 2</a:t>
-            </a:r>
-          </a:p>
-          <a:p>
-            <a:pPr>
-              <a:spcBef>
-                <a:spcPts val="600"/>
-              </a:spcBef>
-              <a:defRPr sz="1600" b="1">
-                <a:solidFill>
-                  <a:srgbClr val="FFFFFF"/>
-                </a:solidFill>
-              </a:defRPr>
-            </a:pPr>
-            <a:r>
-              <a:t>In-App Student Offer</a:t>
-            </a:r>
-          </a:p>
-          <a:p>
-            <a:pPr>
-              <a:spcBef>
-                <a:spcPts val="800"/>
-              </a:spcBef>
-              <a:defRPr sz="1200">
-                <a:solidFill>
-                  <a:srgbClr val="94A3B8"/>
-                </a:solidFill>
-              </a:defRPr>
-            </a:pPr>
-            <a:r>
-              <a:t>Verified peer initiates offer; funds lock into secure escrow.</a:t>
-            </a:r>
-          </a:p>
-        </p:txBody>
-      </p:sp>
-      <p:sp>
-        <p:nvSpPr>
-          <p:cNvPr id="10" name="Rounded Rectangle 9"/>
-          <p:cNvSpPr/>
-          <p:nvPr/>
-        </p:nvSpPr>
-        <p:spPr>
-          <a:xfrm>
-            <a:off x="6126480" y="2011680"/>
-            <a:ext cx="2514600" cy="3840480"/>
-          </a:xfrm>
-          <a:prstGeom prst="roundRect">
-            <a:avLst/>
-          </a:prstGeom>
-          <a:solidFill>
-            <a:srgbClr val="1E293B"/>
-          </a:solidFill>
-          <a:ln w="19050">
-            <a:solidFill>
-              <a:srgbClr val="10B981"/>
-            </a:solidFill>
-          </a:ln>
-        </p:spPr>
-        <p:style>
-          <a:lnRef idx="1">
-            <a:schemeClr val="accent1"/>
-          </a:lnRef>
-          <a:fillRef idx="3">
-            <a:schemeClr val="accent1"/>
-          </a:fillRef>
-          <a:effectRef idx="2">
-            <a:schemeClr val="accent1"/>
-          </a:effectRef>
-          <a:fontRef idx="minor">
-            <a:schemeClr val="lt1"/>
-          </a:fontRef>
-        </p:style>
-        <p:txBody>
-          <a:bodyPr rtlCol="0" anchor="ctr"/>
-          <a:lstStyle/>
-          <a:p>
-            <a:pPr algn="ctr"/>
-          </a:p>
-        </p:txBody>
-      </p:sp>
-      <p:sp>
-        <p:nvSpPr>
-          <p:cNvPr id="11" name="TextBox 10"/>
-          <p:cNvSpPr txBox="1"/>
-          <p:nvPr/>
-        </p:nvSpPr>
-        <p:spPr>
-          <a:xfrm>
-            <a:off x="6263640" y="2194560"/>
-            <a:ext cx="2240280" cy="3474720"/>
-          </a:xfrm>
-          <a:prstGeom prst="rect">
-            <a:avLst/>
-          </a:prstGeom>
-          <a:noFill/>
-        </p:spPr>
-        <p:txBody>
-          <a:bodyPr wrap="square">
-            <a:spAutoFit/>
-          </a:bodyPr>
-          <a:lstStyle/>
-          <a:p>
-            <a:pPr>
-              <a:defRPr sz="1300" b="1">
-                <a:solidFill>
-                  <a:srgbClr val="3B82F6"/>
-                </a:solidFill>
-              </a:defRPr>
-            </a:pPr>
-            <a:r>
-              <a:t>Step 3</a:t>
-            </a:r>
-          </a:p>
-          <a:p>
-            <a:pPr>
-              <a:spcBef>
-                <a:spcPts val="600"/>
-              </a:spcBef>
-              <a:defRPr sz="1600" b="1">
-                <a:solidFill>
-                  <a:srgbClr val="FFFFFF"/>
-                </a:solidFill>
-              </a:defRPr>
-            </a:pPr>
-            <a:r>
-              <a:t>Campus Hub Handover</a:t>
-            </a:r>
-          </a:p>
-          <a:p>
-            <a:pPr>
-              <a:spcBef>
-                <a:spcPts val="800"/>
-              </a:spcBef>
-              <a:defRPr sz="1200">
-                <a:solidFill>
-                  <a:srgbClr val="94A3B8"/>
-                </a:solidFill>
-              </a:defRPr>
-            </a:pPr>
-            <a:r>
-              <a:t>Meet at designated university library locker station for verification.</a:t>
-            </a:r>
-          </a:p>
-        </p:txBody>
-      </p:sp>
-      <p:sp>
-        <p:nvSpPr>
-          <p:cNvPr id="12" name="Rounded Rectangle 11"/>
-          <p:cNvSpPr/>
-          <p:nvPr/>
-        </p:nvSpPr>
-        <p:spPr>
-          <a:xfrm>
-            <a:off x="8823960" y="2011680"/>
-            <a:ext cx="2514600" cy="3840480"/>
-          </a:xfrm>
-          <a:prstGeom prst="roundRect">
-            <a:avLst/>
-          </a:prstGeom>
-          <a:solidFill>
-            <a:srgbClr val="1E293B"/>
-          </a:solidFill>
-          <a:ln w="19050">
-            <a:solidFill>
-              <a:srgbClr val="10B981"/>
-            </a:solidFill>
-          </a:ln>
-        </p:spPr>
-        <p:style>
-          <a:lnRef idx="1">
-            <a:schemeClr val="accent1"/>
-          </a:lnRef>
-          <a:fillRef idx="3">
-            <a:schemeClr val="accent1"/>
-          </a:fillRef>
-          <a:effectRef idx="2">
-            <a:schemeClr val="accent1"/>
-          </a:effectRef>
-          <a:fontRef idx="minor">
-            <a:schemeClr val="lt1"/>
-          </a:fontRef>
-        </p:style>
-        <p:txBody>
-          <a:bodyPr rtlCol="0" anchor="ctr"/>
-          <a:lstStyle/>
-          <a:p>
-            <a:pPr algn="ctr"/>
-          </a:p>
-        </p:txBody>
-      </p:sp>
-      <p:sp>
-        <p:nvSpPr>
-          <p:cNvPr id="13" name="TextBox 12"/>
-          <p:cNvSpPr txBox="1"/>
-          <p:nvPr/>
-        </p:nvSpPr>
-        <p:spPr>
-          <a:xfrm>
-            <a:off x="8961120" y="2194560"/>
-            <a:ext cx="2240280" cy="3474720"/>
-          </a:xfrm>
-          <a:prstGeom prst="rect">
-            <a:avLst/>
-          </a:prstGeom>
-          <a:noFill/>
-        </p:spPr>
-        <p:txBody>
-          <a:bodyPr wrap="square">
-            <a:spAutoFit/>
-          </a:bodyPr>
-          <a:lstStyle/>
-          <a:p>
-            <a:pPr>
-              <a:defRPr sz="1300" b="1">
-                <a:solidFill>
-                  <a:srgbClr val="3B82F6"/>
-                </a:solidFill>
-              </a:defRPr>
-            </a:pPr>
-            <a:r>
-              <a:t>Step 4</a:t>
-            </a:r>
-          </a:p>
-          <a:p>
-            <a:pPr>
-              <a:spcBef>
-                <a:spcPts val="600"/>
-              </a:spcBef>
-              <a:defRPr sz="1600" b="1">
-                <a:solidFill>
-                  <a:srgbClr val="FFFFFF"/>
-                </a:solidFill>
-              </a:defRPr>
-            </a:pPr>
-            <a:r>
-              <a:t>One-Tap Release</a:t>
-            </a:r>
-          </a:p>
-          <a:p>
-            <a:pPr>
-              <a:spcBef>
-                <a:spcPts val="800"/>
-              </a:spcBef>
-              <a:defRPr sz="1200">
-                <a:solidFill>
-                  <a:srgbClr val="94A3B8"/>
-                </a:solidFill>
-              </a:defRPr>
-            </a:pPr>
-            <a:r>
-              <a:t>Buyer approves condition; escrow immediately disburses funds.</a:t>
-            </a:r>
-          </a:p>
-        </p:txBody>
-      </p:sp>
-    </p:spTree>
-  </p:cSld>
-  <p:clrMapOvr>
-    <a:masterClrMapping/>
-  </p:clrMapOvr>
-  <p:transition spd="med">
-    <p:fade/>
-  </p:transition>
+  <mc:AlternateContent xmlns:mc="http://schemas.openxmlformats.org/markup-compatibility/2006">
+    <mc:Choice xmlns:p159="http://schemas.microsoft.com/office/powerpoint/2015/09/main" Requires="p159">
+      <p:transition spd="slow" p14:dur="1500">
+        <p159:morph option="byObject"/>
+      </p:transition>
+    </mc:Choice>
+    <mc:Fallback>
+      <p:transition spd="slow">
+        <p:fade/>
+      </p:transition>
+    </mc:Fallback>
+  </mc:AlternateContent>
 </p:sld>
 </file>
 
